--- a/output/港大经管上海中心_联合合作汇报.pptx
+++ b/output/港大经管上海中心_联合合作汇报.pptx
@@ -15,6 +15,7 @@
     <p:sldId id="263" r:id="rId14"/>
     <p:sldId id="264" r:id="rId15"/>
     <p:sldId id="265" r:id="rId16"/>
+    <p:sldId id="266" r:id="rId17"/>
   </p:sldIdLst>
   <p:sldSz cx="12191695" cy="6858000" type="screen4x3"/>
   <p:notesSz cx="6858000" cy="9144000"/>
@@ -3193,7 +3194,7 @@
         </p:nvSpPr>
         <p:spPr>
           <a:xfrm>
-            <a:off x="777240" y="1234440"/>
+            <a:off x="777240" y="1143000"/>
             <a:ext cx="10515600" cy="365760"/>
           </a:xfrm>
           <a:prstGeom prst="rect">
@@ -3229,7 +3230,7 @@
         </p:nvSpPr>
         <p:spPr>
           <a:xfrm>
-            <a:off x="777240" y="1828800"/>
+            <a:off x="777240" y="1691640"/>
             <a:ext cx="10515600" cy="822960"/>
           </a:xfrm>
           <a:prstGeom prst="rect">
@@ -3265,8 +3266,8 @@
         </p:nvSpPr>
         <p:spPr>
           <a:xfrm>
-            <a:off x="777240" y="2743200"/>
-            <a:ext cx="10515600" cy="457200"/>
+            <a:off x="777240" y="2606040"/>
+            <a:ext cx="10515600" cy="502920"/>
           </a:xfrm>
           <a:prstGeom prst="rect">
             <a:avLst/>
@@ -3288,7 +3289,7 @@
                 <a:latin typeface="微软雅黑"/>
                 <a:ea typeface="微软雅黑"/>
               </a:rPr>
-              <a:t>出海专题课，以及请中心主任到场一事</a:t>
+              <a:t>EMBA招生、外滩出海专题课、请中心主任到场　合在一次合作里</a:t>
             </a:r>
           </a:p>
         </p:txBody>
@@ -3301,7 +3302,7 @@
         </p:nvSpPr>
         <p:spPr>
           <a:xfrm>
-            <a:off x="777240" y="3383280"/>
+            <a:off x="777240" y="3246120"/>
             <a:ext cx="1828800" cy="38100"/>
           </a:xfrm>
           <a:prstGeom prst="rect">
@@ -3345,8 +3346,8 @@
         </p:nvSpPr>
         <p:spPr>
           <a:xfrm>
-            <a:off x="777240" y="3703320"/>
-            <a:ext cx="10241280" cy="1005840"/>
+            <a:off x="777240" y="3520440"/>
+            <a:ext cx="10241280" cy="1097280"/>
           </a:xfrm>
           <a:prstGeom prst="rect">
             <a:avLst/>
@@ -3368,7 +3369,7 @@
                 <a:latin typeface="微软雅黑"/>
                 <a:ea typeface="微软雅黑"/>
               </a:rPr>
-              <a:t>上次在中心见面之后，把可以马上做的事写成这份汇报，并附上协议，请中心审阅。</a:t>
+              <a:t>上次在中心见面之后，把可以马上做的事写成一整包：招生是主项，出海课是这场招生的现场，请主任到场含在同一笔费用里。并附上协议，请中心审阅。</a:t>
             </a:r>
           </a:p>
         </p:txBody>
@@ -3381,7 +3382,7 @@
         </p:nvSpPr>
         <p:spPr>
           <a:xfrm>
-            <a:off x="777240" y="5074920"/>
+            <a:off x="777240" y="4937760"/>
             <a:ext cx="10241280" cy="822960"/>
           </a:xfrm>
           <a:prstGeom prst="rect">
@@ -3418,7 +3419,7 @@
         </p:nvSpPr>
         <p:spPr>
           <a:xfrm>
-            <a:off x="777240" y="6126480"/>
+            <a:off x="777240" y="5989320"/>
             <a:ext cx="10241280" cy="320040"/>
           </a:xfrm>
           <a:prstGeom prst="rect">
@@ -3473,7 +3474,7 @@
         <p:spPr>
           <a:xfrm>
             <a:off x="0" y="0"/>
-            <a:ext cx="12191695" cy="6858000"/>
+            <a:ext cx="12191695" cy="932688"/>
           </a:xfrm>
           <a:prstGeom prst="rect">
             <a:avLst/>
@@ -3516,8 +3517,8 @@
         </p:nvSpPr>
         <p:spPr>
           <a:xfrm>
-            <a:off x="0" y="0"/>
-            <a:ext cx="146304" cy="6858000"/>
+            <a:off x="0" y="932688"/>
+            <a:ext cx="12191695" cy="38100"/>
           </a:xfrm>
           <a:prstGeom prst="rect">
             <a:avLst/>
@@ -3560,8 +3561,572 @@
         </p:nvSpPr>
         <p:spPr>
           <a:xfrm>
-            <a:off x="822960" y="2011680"/>
-            <a:ext cx="10515600" cy="640080"/>
+            <a:off x="502920" y="146304"/>
+            <a:ext cx="10241280" cy="640080"/>
+          </a:xfrm>
+          <a:prstGeom prst="rect">
+            <a:avLst/>
+          </a:prstGeom>
+          <a:noFill/>
+        </p:spPr>
+        <p:txBody>
+          <a:bodyPr wrap="square" anchor="ctr">
+            <a:spAutoFit/>
+          </a:bodyPr>
+          <a:lstStyle/>
+          <a:p>
+            <a:pPr algn="l"/>
+            <a:r>
+              <a:rPr sz="2400" b="1">
+                <a:solidFill>
+                  <a:srgbClr val="FFFFFF"/>
+                </a:solidFill>
+                <a:latin typeface="微软雅黑"/>
+                <a:ea typeface="微软雅黑"/>
+              </a:rPr>
+              <a:t>请中心定几件事</a:t>
+            </a:r>
+          </a:p>
+        </p:txBody>
+      </p:sp>
+      <p:sp>
+        <p:nvSpPr>
+          <p:cNvPr id="5" name="TextBox 4"/>
+          <p:cNvSpPr txBox="1"/>
+          <p:nvPr/>
+        </p:nvSpPr>
+        <p:spPr>
+          <a:xfrm>
+            <a:off x="10515600" y="146304"/>
+            <a:ext cx="1280160" cy="640080"/>
+          </a:xfrm>
+          <a:prstGeom prst="rect">
+            <a:avLst/>
+          </a:prstGeom>
+          <a:noFill/>
+        </p:spPr>
+        <p:txBody>
+          <a:bodyPr wrap="square" anchor="ctr">
+            <a:spAutoFit/>
+          </a:bodyPr>
+          <a:lstStyle/>
+          <a:p>
+            <a:pPr algn="r"/>
+            <a:r>
+              <a:rPr sz="1200" b="1">
+                <a:solidFill>
+                  <a:srgbClr val="C4A35A"/>
+                </a:solidFill>
+                <a:latin typeface="微软雅黑"/>
+                <a:ea typeface="微软雅黑"/>
+              </a:rPr>
+              <a:t>10/11</a:t>
+            </a:r>
+          </a:p>
+        </p:txBody>
+      </p:sp>
+      <p:sp>
+        <p:nvSpPr>
+          <p:cNvPr id="6" name="Rounded Rectangle 5"/>
+          <p:cNvSpPr/>
+          <p:nvPr/>
+        </p:nvSpPr>
+        <p:spPr>
+          <a:xfrm>
+            <a:off x="502920" y="1280160"/>
+            <a:ext cx="11155680" cy="1097280"/>
+          </a:xfrm>
+          <a:prstGeom prst="roundRect">
+            <a:avLst>
+              <a:gd name="adj" fmla="val 8000"/>
+            </a:avLst>
+          </a:prstGeom>
+          <a:solidFill>
+            <a:srgbClr val="FFFFFF"/>
+          </a:solidFill>
+          <a:ln>
+            <a:noFill/>
+          </a:ln>
+          <a:effectLst/>
+        </p:spPr>
+        <p:style>
+          <a:lnRef idx="1">
+            <a:schemeClr val="accent1"/>
+          </a:lnRef>
+          <a:fillRef idx="3">
+            <a:schemeClr val="accent1"/>
+          </a:fillRef>
+          <a:effectRef idx="2">
+            <a:schemeClr val="accent1"/>
+          </a:effectRef>
+          <a:fontRef idx="minor">
+            <a:schemeClr val="lt1"/>
+          </a:fontRef>
+        </p:style>
+        <p:txBody>
+          <a:bodyPr rtlCol="0" anchor="ctr"/>
+          <a:lstStyle/>
+          <a:p>
+            <a:pPr algn="ctr"/>
+          </a:p>
+        </p:txBody>
+      </p:sp>
+      <p:sp>
+        <p:nvSpPr>
+          <p:cNvPr id="7" name="Rounded Rectangle 6"/>
+          <p:cNvSpPr/>
+          <p:nvPr/>
+        </p:nvSpPr>
+        <p:spPr>
+          <a:xfrm>
+            <a:off x="731520" y="1536192"/>
+            <a:ext cx="594360" cy="594360"/>
+          </a:xfrm>
+          <a:prstGeom prst="roundRect">
+            <a:avLst>
+              <a:gd name="adj" fmla="val 8000"/>
+            </a:avLst>
+          </a:prstGeom>
+          <a:solidFill>
+            <a:srgbClr val="C4A35A"/>
+          </a:solidFill>
+          <a:ln>
+            <a:noFill/>
+          </a:ln>
+          <a:effectLst/>
+        </p:spPr>
+        <p:style>
+          <a:lnRef idx="1">
+            <a:schemeClr val="accent1"/>
+          </a:lnRef>
+          <a:fillRef idx="3">
+            <a:schemeClr val="accent1"/>
+          </a:fillRef>
+          <a:effectRef idx="2">
+            <a:schemeClr val="accent1"/>
+          </a:effectRef>
+          <a:fontRef idx="minor">
+            <a:schemeClr val="lt1"/>
+          </a:fontRef>
+        </p:style>
+        <p:txBody>
+          <a:bodyPr rtlCol="0" anchor="ctr"/>
+          <a:lstStyle/>
+          <a:p>
+            <a:pPr algn="ctr"/>
+          </a:p>
+        </p:txBody>
+      </p:sp>
+      <p:sp>
+        <p:nvSpPr>
+          <p:cNvPr id="8" name="TextBox 7"/>
+          <p:cNvSpPr txBox="1"/>
+          <p:nvPr/>
+        </p:nvSpPr>
+        <p:spPr>
+          <a:xfrm>
+            <a:off x="731520" y="1536192"/>
+            <a:ext cx="594360" cy="594360"/>
+          </a:xfrm>
+          <a:prstGeom prst="rect">
+            <a:avLst/>
+          </a:prstGeom>
+          <a:noFill/>
+        </p:spPr>
+        <p:txBody>
+          <a:bodyPr wrap="square" anchor="ctr">
+            <a:spAutoFit/>
+          </a:bodyPr>
+          <a:lstStyle/>
+          <a:p>
+            <a:pPr algn="ctr"/>
+            <a:r>
+              <a:rPr sz="2000" b="1">
+                <a:solidFill>
+                  <a:srgbClr val="003D2E"/>
+                </a:solidFill>
+                <a:latin typeface="微软雅黑"/>
+                <a:ea typeface="微软雅黑"/>
+              </a:rPr>
+              <a:t>1</a:t>
+            </a:r>
+          </a:p>
+        </p:txBody>
+      </p:sp>
+      <p:sp>
+        <p:nvSpPr>
+          <p:cNvPr id="9" name="TextBox 8"/>
+          <p:cNvSpPr txBox="1"/>
+          <p:nvPr/>
+        </p:nvSpPr>
+        <p:spPr>
+          <a:xfrm>
+            <a:off x="1554480" y="1463040"/>
+            <a:ext cx="9784080" cy="731520"/>
+          </a:xfrm>
+          <a:prstGeom prst="rect">
+            <a:avLst/>
+          </a:prstGeom>
+          <a:noFill/>
+        </p:spPr>
+        <p:txBody>
+          <a:bodyPr wrap="square" anchor="ctr">
+            <a:spAutoFit/>
+          </a:bodyPr>
+          <a:lstStyle/>
+          <a:p>
+            <a:pPr algn="l"/>
+            <a:r>
+              <a:rPr sz="1800" b="0">
+                <a:solidFill>
+                  <a:srgbClr val="1A2420"/>
+                </a:solidFill>
+                <a:latin typeface="微软雅黑"/>
+                <a:ea typeface="微软雅黑"/>
+              </a:rPr>
+              <a:t>外滩专题课放在哪一天；课后招生老师由谁接、怎么接。</a:t>
+            </a:r>
+          </a:p>
+        </p:txBody>
+      </p:sp>
+      <p:sp>
+        <p:nvSpPr>
+          <p:cNvPr id="10" name="Rounded Rectangle 9"/>
+          <p:cNvSpPr/>
+          <p:nvPr/>
+        </p:nvSpPr>
+        <p:spPr>
+          <a:xfrm>
+            <a:off x="502920" y="2514600"/>
+            <a:ext cx="11155680" cy="1097280"/>
+          </a:xfrm>
+          <a:prstGeom prst="roundRect">
+            <a:avLst>
+              <a:gd name="adj" fmla="val 8000"/>
+            </a:avLst>
+          </a:prstGeom>
+          <a:solidFill>
+            <a:srgbClr val="FFFFFF"/>
+          </a:solidFill>
+          <a:ln>
+            <a:noFill/>
+          </a:ln>
+          <a:effectLst/>
+        </p:spPr>
+        <p:style>
+          <a:lnRef idx="1">
+            <a:schemeClr val="accent1"/>
+          </a:lnRef>
+          <a:fillRef idx="3">
+            <a:schemeClr val="accent1"/>
+          </a:fillRef>
+          <a:effectRef idx="2">
+            <a:schemeClr val="accent1"/>
+          </a:effectRef>
+          <a:fontRef idx="minor">
+            <a:schemeClr val="lt1"/>
+          </a:fontRef>
+        </p:style>
+        <p:txBody>
+          <a:bodyPr rtlCol="0" anchor="ctr"/>
+          <a:lstStyle/>
+          <a:p>
+            <a:pPr algn="ctr"/>
+          </a:p>
+        </p:txBody>
+      </p:sp>
+      <p:sp>
+        <p:nvSpPr>
+          <p:cNvPr id="11" name="Rounded Rectangle 10"/>
+          <p:cNvSpPr/>
+          <p:nvPr/>
+        </p:nvSpPr>
+        <p:spPr>
+          <a:xfrm>
+            <a:off x="731520" y="2770632"/>
+            <a:ext cx="594360" cy="594360"/>
+          </a:xfrm>
+          <a:prstGeom prst="roundRect">
+            <a:avLst>
+              <a:gd name="adj" fmla="val 8000"/>
+            </a:avLst>
+          </a:prstGeom>
+          <a:solidFill>
+            <a:srgbClr val="C4A35A"/>
+          </a:solidFill>
+          <a:ln>
+            <a:noFill/>
+          </a:ln>
+          <a:effectLst/>
+        </p:spPr>
+        <p:style>
+          <a:lnRef idx="1">
+            <a:schemeClr val="accent1"/>
+          </a:lnRef>
+          <a:fillRef idx="3">
+            <a:schemeClr val="accent1"/>
+          </a:fillRef>
+          <a:effectRef idx="2">
+            <a:schemeClr val="accent1"/>
+          </a:effectRef>
+          <a:fontRef idx="minor">
+            <a:schemeClr val="lt1"/>
+          </a:fontRef>
+        </p:style>
+        <p:txBody>
+          <a:bodyPr rtlCol="0" anchor="ctr"/>
+          <a:lstStyle/>
+          <a:p>
+            <a:pPr algn="ctr"/>
+          </a:p>
+        </p:txBody>
+      </p:sp>
+      <p:sp>
+        <p:nvSpPr>
+          <p:cNvPr id="12" name="TextBox 11"/>
+          <p:cNvSpPr txBox="1"/>
+          <p:nvPr/>
+        </p:nvSpPr>
+        <p:spPr>
+          <a:xfrm>
+            <a:off x="731520" y="2770632"/>
+            <a:ext cx="594360" cy="594360"/>
+          </a:xfrm>
+          <a:prstGeom prst="rect">
+            <a:avLst/>
+          </a:prstGeom>
+          <a:noFill/>
+        </p:spPr>
+        <p:txBody>
+          <a:bodyPr wrap="square" anchor="ctr">
+            <a:spAutoFit/>
+          </a:bodyPr>
+          <a:lstStyle/>
+          <a:p>
+            <a:pPr algn="ctr"/>
+            <a:r>
+              <a:rPr sz="2000" b="1">
+                <a:solidFill>
+                  <a:srgbClr val="003D2E"/>
+                </a:solidFill>
+                <a:latin typeface="微软雅黑"/>
+                <a:ea typeface="微软雅黑"/>
+              </a:rPr>
+              <a:t>2</a:t>
+            </a:r>
+          </a:p>
+        </p:txBody>
+      </p:sp>
+      <p:sp>
+        <p:nvSpPr>
+          <p:cNvPr id="13" name="TextBox 12"/>
+          <p:cNvSpPr txBox="1"/>
+          <p:nvPr/>
+        </p:nvSpPr>
+        <p:spPr>
+          <a:xfrm>
+            <a:off x="1554480" y="2697480"/>
+            <a:ext cx="9784080" cy="731520"/>
+          </a:xfrm>
+          <a:prstGeom prst="rect">
+            <a:avLst/>
+          </a:prstGeom>
+          <a:noFill/>
+        </p:spPr>
+        <p:txBody>
+          <a:bodyPr wrap="square" anchor="ctr">
+            <a:spAutoFit/>
+          </a:bodyPr>
+          <a:lstStyle/>
+          <a:p>
+            <a:pPr algn="l"/>
+            <a:r>
+              <a:rPr sz="1800" b="0">
+                <a:solidFill>
+                  <a:srgbClr val="1A2420"/>
+                </a:solidFill>
+                <a:latin typeface="微软雅黑"/>
+                <a:ea typeface="微软雅黑"/>
+              </a:rPr>
+              <a:t>主任方便出席的大致时间。来不了也没有关系，我们按书面邀请办理。</a:t>
+            </a:r>
+          </a:p>
+        </p:txBody>
+      </p:sp>
+      <p:sp>
+        <p:nvSpPr>
+          <p:cNvPr id="14" name="Rounded Rectangle 13"/>
+          <p:cNvSpPr/>
+          <p:nvPr/>
+        </p:nvSpPr>
+        <p:spPr>
+          <a:xfrm>
+            <a:off x="502920" y="3749039"/>
+            <a:ext cx="11155680" cy="1097280"/>
+          </a:xfrm>
+          <a:prstGeom prst="roundRect">
+            <a:avLst>
+              <a:gd name="adj" fmla="val 8000"/>
+            </a:avLst>
+          </a:prstGeom>
+          <a:solidFill>
+            <a:srgbClr val="FFFFFF"/>
+          </a:solidFill>
+          <a:ln>
+            <a:noFill/>
+          </a:ln>
+          <a:effectLst/>
+        </p:spPr>
+        <p:style>
+          <a:lnRef idx="1">
+            <a:schemeClr val="accent1"/>
+          </a:lnRef>
+          <a:fillRef idx="3">
+            <a:schemeClr val="accent1"/>
+          </a:fillRef>
+          <a:effectRef idx="2">
+            <a:schemeClr val="accent1"/>
+          </a:effectRef>
+          <a:fontRef idx="minor">
+            <a:schemeClr val="lt1"/>
+          </a:fontRef>
+        </p:style>
+        <p:txBody>
+          <a:bodyPr rtlCol="0" anchor="ctr"/>
+          <a:lstStyle/>
+          <a:p>
+            <a:pPr algn="ctr"/>
+          </a:p>
+        </p:txBody>
+      </p:sp>
+      <p:sp>
+        <p:nvSpPr>
+          <p:cNvPr id="15" name="Rounded Rectangle 14"/>
+          <p:cNvSpPr/>
+          <p:nvPr/>
+        </p:nvSpPr>
+        <p:spPr>
+          <a:xfrm>
+            <a:off x="731520" y="4005071"/>
+            <a:ext cx="594360" cy="594360"/>
+          </a:xfrm>
+          <a:prstGeom prst="roundRect">
+            <a:avLst>
+              <a:gd name="adj" fmla="val 8000"/>
+            </a:avLst>
+          </a:prstGeom>
+          <a:solidFill>
+            <a:srgbClr val="C4A35A"/>
+          </a:solidFill>
+          <a:ln>
+            <a:noFill/>
+          </a:ln>
+          <a:effectLst/>
+        </p:spPr>
+        <p:style>
+          <a:lnRef idx="1">
+            <a:schemeClr val="accent1"/>
+          </a:lnRef>
+          <a:fillRef idx="3">
+            <a:schemeClr val="accent1"/>
+          </a:fillRef>
+          <a:effectRef idx="2">
+            <a:schemeClr val="accent1"/>
+          </a:effectRef>
+          <a:fontRef idx="minor">
+            <a:schemeClr val="lt1"/>
+          </a:fontRef>
+        </p:style>
+        <p:txBody>
+          <a:bodyPr rtlCol="0" anchor="ctr"/>
+          <a:lstStyle/>
+          <a:p>
+            <a:pPr algn="ctr"/>
+          </a:p>
+        </p:txBody>
+      </p:sp>
+      <p:sp>
+        <p:nvSpPr>
+          <p:cNvPr id="16" name="TextBox 15"/>
+          <p:cNvSpPr txBox="1"/>
+          <p:nvPr/>
+        </p:nvSpPr>
+        <p:spPr>
+          <a:xfrm>
+            <a:off x="731520" y="4005071"/>
+            <a:ext cx="594360" cy="594360"/>
+          </a:xfrm>
+          <a:prstGeom prst="rect">
+            <a:avLst/>
+          </a:prstGeom>
+          <a:noFill/>
+        </p:spPr>
+        <p:txBody>
+          <a:bodyPr wrap="square" anchor="ctr">
+            <a:spAutoFit/>
+          </a:bodyPr>
+          <a:lstStyle/>
+          <a:p>
+            <a:pPr algn="ctr"/>
+            <a:r>
+              <a:rPr sz="2000" b="1">
+                <a:solidFill>
+                  <a:srgbClr val="003D2E"/>
+                </a:solidFill>
+                <a:latin typeface="微软雅黑"/>
+                <a:ea typeface="微软雅黑"/>
+              </a:rPr>
+              <a:t>3</a:t>
+            </a:r>
+          </a:p>
+        </p:txBody>
+      </p:sp>
+      <p:sp>
+        <p:nvSpPr>
+          <p:cNvPr id="17" name="TextBox 16"/>
+          <p:cNvSpPr txBox="1"/>
+          <p:nvPr/>
+        </p:nvSpPr>
+        <p:spPr>
+          <a:xfrm>
+            <a:off x="1554480" y="3931919"/>
+            <a:ext cx="9784080" cy="731520"/>
+          </a:xfrm>
+          <a:prstGeom prst="rect">
+            <a:avLst/>
+          </a:prstGeom>
+          <a:noFill/>
+        </p:spPr>
+        <p:txBody>
+          <a:bodyPr wrap="square" anchor="ctr">
+            <a:spAutoFit/>
+          </a:bodyPr>
+          <a:lstStyle/>
+          <a:p>
+            <a:pPr algn="l"/>
+            <a:r>
+              <a:rPr sz="1800" b="0">
+                <a:solidFill>
+                  <a:srgbClr val="1A2420"/>
+                </a:solidFill>
+                <a:latin typeface="微软雅黑"/>
+                <a:ea typeface="微软雅黑"/>
+              </a:rPr>
+              <a:t>协议由哪一家主体签，发票抬头是谁，款什么时候付。</a:t>
+            </a:r>
+          </a:p>
+        </p:txBody>
+      </p:sp>
+      <p:sp>
+        <p:nvSpPr>
+          <p:cNvPr id="18" name="TextBox 17"/>
+          <p:cNvSpPr txBox="1"/>
+          <p:nvPr/>
+        </p:nvSpPr>
+        <p:spPr>
+          <a:xfrm>
+            <a:off x="548640" y="5120640"/>
+            <a:ext cx="11064240" cy="1097280"/>
           </a:xfrm>
           <a:prstGeom prst="rect">
             <a:avLst/>
@@ -3574,30 +4139,31 @@
           </a:bodyPr>
           <a:lstStyle/>
           <a:p>
-            <a:pPr algn="l"/>
-            <a:r>
-              <a:rPr sz="2400" b="1">
-                <a:solidFill>
-                  <a:srgbClr val="FFFFFF"/>
-                </a:solidFill>
-                <a:latin typeface="微软雅黑"/>
-                <a:ea typeface="微软雅黑"/>
-              </a:rPr>
-              <a:t>请中心审阅。有要改的地方，我们按中心的意见改。</a:t>
-            </a:r>
-          </a:p>
-        </p:txBody>
-      </p:sp>
-      <p:sp>
-        <p:nvSpPr>
-          <p:cNvPr id="5" name="TextBox 4"/>
+            <a:pPr algn="ctr"/>
+            <a:r>
+              <a:rPr sz="1500" b="0">
+                <a:solidFill>
+                  <a:srgbClr val="5B6B64"/>
+                </a:solidFill>
+                <a:latin typeface="微软雅黑"/>
+                <a:ea typeface="微软雅黑"/>
+              </a:rPr>
+              <a:t>协议文本随这份汇报一并送上。签好、费用到账后七日内，我们提交按 EMBA 门槛初筛的拟邀请名单初稿。
+联系人：潘嘉琰　　(86) 180 1860 6086　　jyanpan@hku.hk</a:t>
+            </a:r>
+          </a:p>
+        </p:txBody>
+      </p:sp>
+      <p:sp>
+        <p:nvSpPr>
+          <p:cNvPr id="19" name="TextBox 18"/>
           <p:cNvSpPr txBox="1"/>
           <p:nvPr/>
         </p:nvSpPr>
         <p:spPr>
           <a:xfrm>
-            <a:off x="822960" y="2926080"/>
-            <a:ext cx="10515600" cy="1097280"/>
+            <a:off x="502920" y="6510528"/>
+            <a:ext cx="11155680" cy="256032"/>
           </a:xfrm>
           <a:prstGeom prst="rect">
             <a:avLst/>
@@ -3612,6 +4178,220 @@
           <a:p>
             <a:pPr algn="l"/>
             <a:r>
+              <a:rPr sz="1000" b="0">
+                <a:solidFill>
+                  <a:srgbClr val="5B6B64"/>
+                </a:solidFill>
+                <a:latin typeface="微软雅黑"/>
+                <a:ea typeface="微软雅黑"/>
+              </a:rPr>
+              <a:t>复旦大学住房政策研究中心  ·  上海市杨浦区科技企业联合会  ·  致香港大学经管学院上海中心</a:t>
+            </a:r>
+          </a:p>
+        </p:txBody>
+      </p:sp>
+    </p:spTree>
+  </p:cSld>
+  <p:clrMapOvr>
+    <a:masterClrMapping/>
+  </p:clrMapOvr>
+</p:sld>
+</file>
+
+<file path=ppt/slides/slide11.xml><?xml version="1.0" encoding="utf-8"?>
+<p:sld xmlns:a="http://schemas.openxmlformats.org/drawingml/2006/main" xmlns:p="http://schemas.openxmlformats.org/presentationml/2006/main" xmlns:r="http://schemas.openxmlformats.org/officeDocument/2006/relationships">
+  <p:cSld>
+    <p:spTree>
+      <p:nvGrpSpPr>
+        <p:cNvPr id="1" name=""/>
+        <p:cNvGrpSpPr/>
+        <p:nvPr/>
+      </p:nvGrpSpPr>
+      <p:grpSpPr/>
+      <p:sp>
+        <p:nvSpPr>
+          <p:cNvPr id="2" name="Rectangle 1"/>
+          <p:cNvSpPr/>
+          <p:nvPr/>
+        </p:nvSpPr>
+        <p:spPr>
+          <a:xfrm>
+            <a:off x="0" y="0"/>
+            <a:ext cx="12191695" cy="6858000"/>
+          </a:xfrm>
+          <a:prstGeom prst="rect">
+            <a:avLst/>
+          </a:prstGeom>
+          <a:solidFill>
+            <a:srgbClr val="003D2E"/>
+          </a:solidFill>
+          <a:ln>
+            <a:noFill/>
+          </a:ln>
+          <a:effectLst/>
+        </p:spPr>
+        <p:style>
+          <a:lnRef idx="1">
+            <a:schemeClr val="accent1"/>
+          </a:lnRef>
+          <a:fillRef idx="3">
+            <a:schemeClr val="accent1"/>
+          </a:fillRef>
+          <a:effectRef idx="2">
+            <a:schemeClr val="accent1"/>
+          </a:effectRef>
+          <a:fontRef idx="minor">
+            <a:schemeClr val="lt1"/>
+          </a:fontRef>
+        </p:style>
+        <p:txBody>
+          <a:bodyPr rtlCol="0" anchor="ctr"/>
+          <a:lstStyle/>
+          <a:p>
+            <a:pPr algn="ctr"/>
+          </a:p>
+        </p:txBody>
+      </p:sp>
+      <p:sp>
+        <p:nvSpPr>
+          <p:cNvPr id="3" name="Rectangle 2"/>
+          <p:cNvSpPr/>
+          <p:nvPr/>
+        </p:nvSpPr>
+        <p:spPr>
+          <a:xfrm>
+            <a:off x="0" y="0"/>
+            <a:ext cx="146304" cy="6858000"/>
+          </a:xfrm>
+          <a:prstGeom prst="rect">
+            <a:avLst/>
+          </a:prstGeom>
+          <a:solidFill>
+            <a:srgbClr val="C4A35A"/>
+          </a:solidFill>
+          <a:ln>
+            <a:noFill/>
+          </a:ln>
+          <a:effectLst/>
+        </p:spPr>
+        <p:style>
+          <a:lnRef idx="1">
+            <a:schemeClr val="accent1"/>
+          </a:lnRef>
+          <a:fillRef idx="3">
+            <a:schemeClr val="accent1"/>
+          </a:fillRef>
+          <a:effectRef idx="2">
+            <a:schemeClr val="accent1"/>
+          </a:effectRef>
+          <a:fontRef idx="minor">
+            <a:schemeClr val="lt1"/>
+          </a:fontRef>
+        </p:style>
+        <p:txBody>
+          <a:bodyPr rtlCol="0" anchor="ctr"/>
+          <a:lstStyle/>
+          <a:p>
+            <a:pPr algn="ctr"/>
+          </a:p>
+        </p:txBody>
+      </p:sp>
+      <p:sp>
+        <p:nvSpPr>
+          <p:cNvPr id="4" name="TextBox 3"/>
+          <p:cNvSpPr txBox="1"/>
+          <p:nvPr/>
+        </p:nvSpPr>
+        <p:spPr>
+          <a:xfrm>
+            <a:off x="822960" y="1874519"/>
+            <a:ext cx="10515600" cy="640080"/>
+          </a:xfrm>
+          <a:prstGeom prst="rect">
+            <a:avLst/>
+          </a:prstGeom>
+          <a:noFill/>
+        </p:spPr>
+        <p:txBody>
+          <a:bodyPr wrap="square" anchor="t">
+            <a:spAutoFit/>
+          </a:bodyPr>
+          <a:lstStyle/>
+          <a:p>
+            <a:pPr algn="l"/>
+            <a:r>
+              <a:rPr sz="2400" b="1">
+                <a:solidFill>
+                  <a:srgbClr val="FFFFFF"/>
+                </a:solidFill>
+                <a:latin typeface="微软雅黑"/>
+                <a:ea typeface="微软雅黑"/>
+              </a:rPr>
+              <a:t>请中心审阅。有要改的地方，我们按中心的意见改。</a:t>
+            </a:r>
+          </a:p>
+        </p:txBody>
+      </p:sp>
+      <p:sp>
+        <p:nvSpPr>
+          <p:cNvPr id="5" name="TextBox 4"/>
+          <p:cNvSpPr txBox="1"/>
+          <p:nvPr/>
+        </p:nvSpPr>
+        <p:spPr>
+          <a:xfrm>
+            <a:off x="822960" y="2651760"/>
+            <a:ext cx="10515600" cy="1005840"/>
+          </a:xfrm>
+          <a:prstGeom prst="rect">
+            <a:avLst/>
+          </a:prstGeom>
+          <a:noFill/>
+        </p:spPr>
+        <p:txBody>
+          <a:bodyPr wrap="square" anchor="t">
+            <a:spAutoFit/>
+          </a:bodyPr>
+          <a:lstStyle/>
+          <a:p>
+            <a:pPr algn="l"/>
+            <a:r>
+              <a:rPr sz="2000" b="0">
+                <a:solidFill>
+                  <a:srgbClr val="C4A35A"/>
+                </a:solidFill>
+                <a:latin typeface="微软雅黑"/>
+                <a:ea typeface="微软雅黑"/>
+              </a:rPr>
+              <a:t>招生、出海课、请主任到场，合在一次合作里，费用一笔。</a:t>
+            </a:r>
+          </a:p>
+        </p:txBody>
+      </p:sp>
+      <p:sp>
+        <p:nvSpPr>
+          <p:cNvPr id="6" name="TextBox 5"/>
+          <p:cNvSpPr txBox="1"/>
+          <p:nvPr/>
+        </p:nvSpPr>
+        <p:spPr>
+          <a:xfrm>
+            <a:off x="822960" y="3794760"/>
+            <a:ext cx="10515600" cy="1097280"/>
+          </a:xfrm>
+          <a:prstGeom prst="rect">
+            <a:avLst/>
+          </a:prstGeom>
+          <a:noFill/>
+        </p:spPr>
+        <p:txBody>
+          <a:bodyPr wrap="square" anchor="t">
+            <a:spAutoFit/>
+          </a:bodyPr>
+          <a:lstStyle/>
+          <a:p>
+            <a:pPr algn="l"/>
+            <a:r>
               <a:rPr sz="1800" b="0">
                 <a:solidFill>
                   <a:srgbClr val="C4A35A"/>
@@ -3628,13 +4408,13 @@
       </p:sp>
       <p:sp>
         <p:nvSpPr>
-          <p:cNvPr id="6" name="TextBox 5"/>
+          <p:cNvPr id="7" name="TextBox 6"/>
           <p:cNvSpPr txBox="1"/>
           <p:nvPr/>
         </p:nvSpPr>
         <p:spPr>
           <a:xfrm>
-            <a:off x="822960" y="5029200"/>
+            <a:off x="822960" y="5212080"/>
             <a:ext cx="10515600" cy="731520"/>
           </a:xfrm>
           <a:prstGeom prst="rect">
@@ -3835,7 +4615,7 @@
                 <a:latin typeface="微软雅黑"/>
                 <a:ea typeface="微软雅黑"/>
               </a:rPr>
-              <a:t>2/10</a:t>
+              <a:t>2/11</a:t>
             </a:r>
           </a:p>
         </p:txBody>
@@ -3848,8 +4628,8 @@
         </p:nvSpPr>
         <p:spPr>
           <a:xfrm>
-            <a:off x="457200" y="1234440"/>
-            <a:ext cx="11247120" cy="1554480"/>
+            <a:off x="457200" y="1170432"/>
+            <a:ext cx="11247120" cy="1417320"/>
           </a:xfrm>
           <a:prstGeom prst="roundRect">
             <a:avLst>
@@ -3894,8 +4674,8 @@
         </p:nvSpPr>
         <p:spPr>
           <a:xfrm>
-            <a:off x="685800" y="1371600"/>
-            <a:ext cx="10789920" cy="1280160"/>
+            <a:off x="685800" y="1280160"/>
+            <a:ext cx="10789920" cy="1188720"/>
           </a:xfrm>
           <a:prstGeom prst="rect">
             <a:avLst/>
@@ -3910,14 +4690,14 @@
           <a:p>
             <a:pPr algn="l"/>
             <a:r>
-              <a:rPr sz="1800" b="0">
+              <a:rPr sz="1700" b="0">
                 <a:solidFill>
                   <a:srgbClr val="1A2420"/>
                 </a:solidFill>
                 <a:latin typeface="微软雅黑"/>
                 <a:ea typeface="微软雅黑"/>
               </a:rPr>
-              <a:t>潘老师：上次在外滩中心，谈到华东、华中的招生和市场，也谈到出海，以及请中心主任到现场看一看。回来后我们只写了两件事，把费用和交付写清楚，方便中心内部过目。</a:t>
+              <a:t>潘老师：上次谈到华东、华中的招生和市场，主事是 EMBA；也谈到出海，以及请主任到现场看一看。回来后写成一整包。八万八千元不是单独请主任看一场总领事活动。</a:t>
             </a:r>
           </a:p>
         </p:txBody>
@@ -3930,8 +4710,8 @@
         </p:nvSpPr>
         <p:spPr>
           <a:xfrm>
-            <a:off x="457200" y="2971800"/>
-            <a:ext cx="11247120" cy="987552"/>
+            <a:off x="457200" y="2761488"/>
+            <a:ext cx="11247120" cy="1060704"/>
           </a:xfrm>
           <a:prstGeom prst="roundRect">
             <a:avLst>
@@ -3976,8 +4756,8 @@
         </p:nvSpPr>
         <p:spPr>
           <a:xfrm>
-            <a:off x="457200" y="2971800"/>
-            <a:ext cx="1463040" cy="987552"/>
+            <a:off x="457200" y="2761488"/>
+            <a:ext cx="1965960" cy="1060704"/>
           </a:xfrm>
           <a:prstGeom prst="rect">
             <a:avLst/>
@@ -4020,8 +4800,8 @@
         </p:nvSpPr>
         <p:spPr>
           <a:xfrm>
-            <a:off x="457200" y="2971800"/>
-            <a:ext cx="1463040" cy="987552"/>
+            <a:off x="457200" y="2761488"/>
+            <a:ext cx="1965960" cy="1060704"/>
           </a:xfrm>
           <a:prstGeom prst="rect">
             <a:avLst/>
@@ -4036,14 +4816,14 @@
           <a:p>
             <a:pPr algn="ctr"/>
             <a:r>
-              <a:rPr sz="1600" b="1">
+              <a:rPr sz="1500" b="1">
                 <a:solidFill>
                   <a:srgbClr val="FFFFFF"/>
                 </a:solidFill>
                 <a:latin typeface="微软雅黑"/>
                 <a:ea typeface="微软雅黑"/>
               </a:rPr>
-              <a:t>第一件</a:t>
+              <a:t>第一件　招生</a:t>
             </a:r>
           </a:p>
         </p:txBody>
@@ -4056,8 +4836,8 @@
         </p:nvSpPr>
         <p:spPr>
           <a:xfrm>
-            <a:off x="2103120" y="3108960"/>
-            <a:ext cx="9326880" cy="713232"/>
+            <a:off x="2606040" y="2871216"/>
+            <a:ext cx="8869680" cy="841248"/>
           </a:xfrm>
           <a:prstGeom prst="rect">
             <a:avLst/>
@@ -4079,7 +4859,7 @@
                 <a:latin typeface="微软雅黑"/>
                 <a:ea typeface="微软雅黑"/>
               </a:rPr>
-              <a:t>在外滩中心办一场出海专题课。三十到四十人。我们把人请来，中心出场地和老师，课后由招生老师单独沟通。</a:t>
+              <a:t>按港大 EMBA 常见门槛初筛不少于八十人，请三十到四十人到外滩。课后由招生老师单独沟通。录取仍由学院决定，不按人头分成。</a:t>
             </a:r>
           </a:p>
         </p:txBody>
@@ -4092,8 +4872,8 @@
         </p:nvSpPr>
         <p:spPr>
           <a:xfrm>
-            <a:off x="457200" y="4069080"/>
-            <a:ext cx="11247120" cy="987552"/>
+            <a:off x="457200" y="3931920"/>
+            <a:ext cx="11247120" cy="1060704"/>
           </a:xfrm>
           <a:prstGeom prst="roundRect">
             <a:avLst>
@@ -4138,8 +4918,8 @@
         </p:nvSpPr>
         <p:spPr>
           <a:xfrm>
-            <a:off x="457200" y="4069080"/>
-            <a:ext cx="1463040" cy="987552"/>
+            <a:off x="457200" y="3931920"/>
+            <a:ext cx="1965960" cy="1060704"/>
           </a:xfrm>
           <a:prstGeom prst="rect">
             <a:avLst/>
@@ -4182,8 +4962,8 @@
         </p:nvSpPr>
         <p:spPr>
           <a:xfrm>
-            <a:off x="457200" y="4069080"/>
-            <a:ext cx="1463040" cy="987552"/>
+            <a:off x="457200" y="3931920"/>
+            <a:ext cx="1965960" cy="1060704"/>
           </a:xfrm>
           <a:prstGeom prst="rect">
             <a:avLst/>
@@ -4198,14 +4978,14 @@
           <a:p>
             <a:pPr algn="ctr"/>
             <a:r>
-              <a:rPr sz="1600" b="1">
+              <a:rPr sz="1500" b="1">
                 <a:solidFill>
                   <a:srgbClr val="FFFFFF"/>
                 </a:solidFill>
                 <a:latin typeface="微软雅黑"/>
                 <a:ea typeface="微软雅黑"/>
               </a:rPr>
-              <a:t>第二件</a:t>
+              <a:t>第二件　出海课</a:t>
             </a:r>
           </a:p>
         </p:txBody>
@@ -4218,8 +4998,8 @@
         </p:nvSpPr>
         <p:spPr>
           <a:xfrm>
-            <a:off x="2103120" y="4206240"/>
-            <a:ext cx="9326880" cy="713232"/>
+            <a:off x="2606040" y="4041648"/>
+            <a:ext cx="8869680" cy="841248"/>
           </a:xfrm>
           <a:prstGeom prst="rect">
             <a:avLst/>
@@ -4241,7 +5021,7 @@
                 <a:latin typeface="微软雅黑"/>
                 <a:ea typeface="微软雅黑"/>
               </a:rPr>
-              <a:t>请中心主任参加我们正在办的一场出海活动。主任方不方便，完全按中心的时间。</a:t>
+              <a:t>这场课的主题放在企业出海和赴港上市，同时就是招生现场。不另办一场空的说明会，也不另收费。</a:t>
             </a:r>
           </a:p>
         </p:txBody>
@@ -4254,8 +5034,8 @@
         </p:nvSpPr>
         <p:spPr>
           <a:xfrm>
-            <a:off x="457200" y="5166360"/>
-            <a:ext cx="11247120" cy="987552"/>
+            <a:off x="457200" y="5102352"/>
+            <a:ext cx="11247120" cy="1060704"/>
           </a:xfrm>
           <a:prstGeom prst="roundRect">
             <a:avLst>
@@ -4300,8 +5080,8 @@
         </p:nvSpPr>
         <p:spPr>
           <a:xfrm>
-            <a:off x="457200" y="5166360"/>
-            <a:ext cx="1463040" cy="987552"/>
+            <a:off x="457200" y="5102352"/>
+            <a:ext cx="1965960" cy="1060704"/>
           </a:xfrm>
           <a:prstGeom prst="rect">
             <a:avLst/>
@@ -4344,8 +5124,8 @@
         </p:nvSpPr>
         <p:spPr>
           <a:xfrm>
-            <a:off x="457200" y="5166360"/>
-            <a:ext cx="1463040" cy="987552"/>
+            <a:off x="457200" y="5102352"/>
+            <a:ext cx="1965960" cy="1060704"/>
           </a:xfrm>
           <a:prstGeom prst="rect">
             <a:avLst/>
@@ -4360,14 +5140,14 @@
           <a:p>
             <a:pPr algn="ctr"/>
             <a:r>
-              <a:rPr sz="1600" b="1">
+              <a:rPr sz="1500" b="1">
                 <a:solidFill>
                   <a:srgbClr val="FFFFFF"/>
                 </a:solidFill>
                 <a:latin typeface="微软雅黑"/>
                 <a:ea typeface="微软雅黑"/>
               </a:rPr>
-              <a:t>先不做的</a:t>
+              <a:t>第三件　请主任</a:t>
             </a:r>
           </a:p>
         </p:txBody>
@@ -4380,8 +5160,8 @@
         </p:nvSpPr>
         <p:spPr>
           <a:xfrm>
-            <a:off x="2103120" y="5303520"/>
-            <a:ext cx="9326880" cy="713232"/>
+            <a:off x="2606040" y="5212080"/>
+            <a:ext cx="8869680" cy="841248"/>
           </a:xfrm>
           <a:prstGeom prst="rect">
             <a:avLst/>
@@ -4403,7 +5183,7 @@
                 <a:latin typeface="微软雅黑"/>
                 <a:ea typeface="微软雅黑"/>
               </a:rPr>
-              <a:t>港大本部的出海课程怎么推广、原创谷怎么合作、学生在上海实习参访，本期不写进交付，以后另说。</a:t>
+              <a:t>我们办的出海活动请主任看一次。这一项含在同一笔八万八千元里，不另收费、不单开报价。</a:t>
             </a:r>
           </a:p>
         </p:txBody>
@@ -4617,7 +5397,7 @@
                 <a:latin typeface="微软雅黑"/>
                 <a:ea typeface="微软雅黑"/>
               </a:rPr>
-              <a:t>3/10</a:t>
+              <a:t>3/11</a:t>
             </a:r>
           </a:p>
         </p:txBody>
@@ -4670,7 +5450,7 @@
                 <a:latin typeface="微软雅黑"/>
                 <a:ea typeface="微软雅黑"/>
               </a:rPr>
-              <a:t>中心在上海已经开始运转。招生宣传、学生来沪学习实习、复旦与港大合办课程迁回中心上课，这些都需要把合适的人请到外滩来。</a:t>
+              <a:t>潘老师负责华东、华中 EMBA 的招生和市场。我们长期在上海办企业和校友活动，手里有一批企业负责人。</a:t>
             </a:r>
           </a:p>
           <a:p>
@@ -4700,7 +5480,7 @@
                 <a:latin typeface="微软雅黑"/>
                 <a:ea typeface="微软雅黑"/>
               </a:rPr>
-              <a:t>潘老师负责华东、华中高端教育的招生和市场。我们长期在上海办企业和校友活动，手里有一批企业负责人。</a:t>
+              <a:t>中心在上海已经开始运转。要把合适的人请到外滩来，听老师讲，再由招生老师单独谈。</a:t>
             </a:r>
           </a:p>
           <a:p>
@@ -4730,7 +5510,7 @@
                 <a:latin typeface="微软雅黑"/>
                 <a:ea typeface="微软雅黑"/>
               </a:rPr>
-              <a:t>港大在企业出海、赴港上市这件事上，内地学校很难替代。我们能做的，是把真正在做出海打算的人请到中心，听老师讲、再单独谈。</a:t>
+              <a:t>港大在企业出海、赴港上市这件事上，内地学校很难替代。所以这场招生的主题放在出海上，不办空的说明会。</a:t>
             </a:r>
           </a:p>
           <a:p>
@@ -4760,7 +5540,7 @@
                 <a:latin typeface="微软雅黑"/>
                 <a:ea typeface="微软雅黑"/>
               </a:rPr>
-              <a:t>所以这场合作就放在出海上，不办空的招生说明会。</a:t>
+              <a:t>若以后还要在学院层面合作，需要主任先看过现场。请主任出席我们办的出海活动，和招生、出海课写在同一包里，不另收费。</a:t>
             </a:r>
           </a:p>
         </p:txBody>
@@ -4938,7 +5718,7 @@
                 <a:latin typeface="微软雅黑"/>
                 <a:ea typeface="微软雅黑"/>
               </a:rPr>
-              <a:t>外滩出海专题课</a:t>
+              <a:t>EMBA 招生这一项</a:t>
             </a:r>
           </a:p>
         </p:txBody>
@@ -4974,7 +5754,7 @@
                 <a:latin typeface="微软雅黑"/>
                 <a:ea typeface="微软雅黑"/>
               </a:rPr>
-              <a:t>4/10</a:t>
+              <a:t>4/11</a:t>
             </a:r>
           </a:p>
         </p:txBody>
@@ -4988,7 +5768,7 @@
         <p:spPr>
           <a:xfrm>
             <a:off x="457200" y="1170432"/>
-            <a:ext cx="11247120" cy="713232"/>
+            <a:ext cx="11247120" cy="877824"/>
           </a:xfrm>
           <a:prstGeom prst="roundRect">
             <a:avLst>
@@ -5034,7 +5814,7 @@
         <p:spPr>
           <a:xfrm>
             <a:off x="640080" y="1170432"/>
-            <a:ext cx="1371600" cy="713232"/>
+            <a:ext cx="1371600" cy="877824"/>
           </a:xfrm>
           <a:prstGeom prst="rect">
             <a:avLst/>
@@ -5056,7 +5836,7 @@
                 <a:latin typeface="微软雅黑"/>
                 <a:ea typeface="微软雅黑"/>
               </a:rPr>
-              <a:t>时间</a:t>
+              <a:t>名单</a:t>
             </a:r>
           </a:p>
         </p:txBody>
@@ -5070,7 +5850,7 @@
         <p:spPr>
           <a:xfrm>
             <a:off x="2194560" y="1170432"/>
-            <a:ext cx="9235440" cy="713232"/>
+            <a:ext cx="9235440" cy="877824"/>
           </a:xfrm>
           <a:prstGeom prst="rect">
             <a:avLst/>
@@ -5092,7 +5872,7 @@
                 <a:latin typeface="微软雅黑"/>
                 <a:ea typeface="微软雅黑"/>
               </a:rPr>
-              <a:t>协议签订后一个月左右，选一个工作日下午，四点左右结束。</a:t>
+              <a:t>协议生效、费用到账后七日内提交初稿，不少于八十人。双方看过再定，名单共同使用。</a:t>
             </a:r>
           </a:p>
         </p:txBody>
@@ -5105,8 +5885,8 @@
         </p:nvSpPr>
         <p:spPr>
           <a:xfrm>
-            <a:off x="457200" y="1975104"/>
-            <a:ext cx="11247120" cy="713232"/>
+            <a:off x="457200" y="2157984"/>
+            <a:ext cx="11247120" cy="877824"/>
           </a:xfrm>
           <a:prstGeom prst="roundRect">
             <a:avLst>
@@ -5151,8 +5931,8 @@
         </p:nvSpPr>
         <p:spPr>
           <a:xfrm>
-            <a:off x="640080" y="1975104"/>
-            <a:ext cx="1371600" cy="713232"/>
+            <a:off x="640080" y="2157984"/>
+            <a:ext cx="1371600" cy="877824"/>
           </a:xfrm>
           <a:prstGeom prst="rect">
             <a:avLst/>
@@ -5174,7 +5954,7 @@
                 <a:latin typeface="微软雅黑"/>
                 <a:ea typeface="微软雅黑"/>
               </a:rPr>
-              <a:t>地点</a:t>
+              <a:t>门槛</a:t>
             </a:r>
           </a:p>
         </p:txBody>
@@ -5187,8 +5967,8 @@
         </p:nvSpPr>
         <p:spPr>
           <a:xfrm>
-            <a:off x="2194560" y="1975104"/>
-            <a:ext cx="9235440" cy="713232"/>
+            <a:off x="2194560" y="2157984"/>
+            <a:ext cx="9235440" cy="877824"/>
           </a:xfrm>
           <a:prstGeom prst="rect">
             <a:avLst/>
@@ -5210,7 +5990,7 @@
                 <a:latin typeface="微软雅黑"/>
                 <a:ea typeface="微软雅黑"/>
               </a:rPr>
-              <a:t>香港大学经管学院上海中心，外滩 SOHO F 栋。</a:t>
+              <a:t>企业负责人或具备相应支付能力的人选，按港大 EMBA 常见要求初筛。具体条件以中心告知为准。</a:t>
             </a:r>
           </a:p>
         </p:txBody>
@@ -5223,8 +6003,8 @@
         </p:nvSpPr>
         <p:spPr>
           <a:xfrm>
-            <a:off x="457200" y="2779776"/>
-            <a:ext cx="11247120" cy="713232"/>
+            <a:off x="457200" y="3145536"/>
+            <a:ext cx="11247120" cy="877824"/>
           </a:xfrm>
           <a:prstGeom prst="roundRect">
             <a:avLst>
@@ -5269,8 +6049,8 @@
         </p:nvSpPr>
         <p:spPr>
           <a:xfrm>
-            <a:off x="640080" y="2779776"/>
-            <a:ext cx="1371600" cy="713232"/>
+            <a:off x="640080" y="3145536"/>
+            <a:ext cx="1371600" cy="877824"/>
           </a:xfrm>
           <a:prstGeom prst="rect">
             <a:avLst/>
@@ -5292,7 +6072,7 @@
                 <a:latin typeface="微软雅黑"/>
                 <a:ea typeface="微软雅黑"/>
               </a:rPr>
-              <a:t>人数</a:t>
+              <a:t>到场</a:t>
             </a:r>
           </a:p>
         </p:txBody>
@@ -5305,8 +6085,8 @@
         </p:nvSpPr>
         <p:spPr>
           <a:xfrm>
-            <a:off x="2194560" y="2779776"/>
-            <a:ext cx="9235440" cy="713232"/>
+            <a:off x="2194560" y="3145536"/>
+            <a:ext cx="9235440" cy="877824"/>
           </a:xfrm>
           <a:prstGeom prst="rect">
             <a:avLst/>
@@ -5328,7 +6108,7 @@
                 <a:latin typeface="微软雅黑"/>
                 <a:ea typeface="微软雅黑"/>
               </a:rPr>
-              <a:t>三十到四十人。</a:t>
+              <a:t>从名单里请三十到四十人到外滩中心上课。不保证每一个人都到，但到场的人按上述门槛来。</a:t>
             </a:r>
           </a:p>
         </p:txBody>
@@ -5341,8 +6121,8 @@
         </p:nvSpPr>
         <p:spPr>
           <a:xfrm>
-            <a:off x="457200" y="3584448"/>
-            <a:ext cx="11247120" cy="713232"/>
+            <a:off x="457200" y="4133088"/>
+            <a:ext cx="11247120" cy="877824"/>
           </a:xfrm>
           <a:prstGeom prst="roundRect">
             <a:avLst>
@@ -5387,8 +6167,8 @@
         </p:nvSpPr>
         <p:spPr>
           <a:xfrm>
-            <a:off x="640080" y="3584448"/>
-            <a:ext cx="1371600" cy="713232"/>
+            <a:off x="640080" y="4133088"/>
+            <a:ext cx="1371600" cy="877824"/>
           </a:xfrm>
           <a:prstGeom prst="rect">
             <a:avLst/>
@@ -5410,7 +6190,7 @@
                 <a:latin typeface="微软雅黑"/>
                 <a:ea typeface="微软雅黑"/>
               </a:rPr>
-              <a:t>来宾</a:t>
+              <a:t>课后</a:t>
             </a:r>
           </a:p>
         </p:txBody>
@@ -5423,8 +6203,8 @@
         </p:nvSpPr>
         <p:spPr>
           <a:xfrm>
-            <a:off x="2194560" y="3584448"/>
-            <a:ext cx="9235440" cy="713232"/>
+            <a:off x="2194560" y="4133088"/>
+            <a:ext cx="9235440" cy="877824"/>
           </a:xfrm>
           <a:prstGeom prst="rect">
             <a:avLst/>
@@ -5446,7 +6226,7 @@
                 <a:latin typeface="微软雅黑"/>
                 <a:ea typeface="微软雅黑"/>
               </a:rPr>
-              <a:t>正在考虑出海或赴港上市的企业负责人。</a:t>
+              <a:t>由潘老师或中心指定的招生老师单独沟通。我们在七日内把到场情况和有意向的人整理好交给中心。</a:t>
             </a:r>
           </a:p>
         </p:txBody>
@@ -5459,8 +6239,8 @@
         </p:nvSpPr>
         <p:spPr>
           <a:xfrm>
-            <a:off x="457200" y="4389120"/>
-            <a:ext cx="11247120" cy="713232"/>
+            <a:off x="457200" y="5120640"/>
+            <a:ext cx="11247120" cy="877824"/>
           </a:xfrm>
           <a:prstGeom prst="roundRect">
             <a:avLst>
@@ -5505,8 +6285,8 @@
         </p:nvSpPr>
         <p:spPr>
           <a:xfrm>
-            <a:off x="640080" y="4389120"/>
-            <a:ext cx="1371600" cy="713232"/>
+            <a:off x="640080" y="5120640"/>
+            <a:ext cx="1371600" cy="877824"/>
           </a:xfrm>
           <a:prstGeom prst="rect">
             <a:avLst/>
@@ -5528,7 +6308,7 @@
                 <a:latin typeface="微软雅黑"/>
                 <a:ea typeface="微软雅黑"/>
               </a:rPr>
-              <a:t>内容</a:t>
+              <a:t>录取</a:t>
             </a:r>
           </a:p>
         </p:txBody>
@@ -5541,8 +6321,8 @@
         </p:nvSpPr>
         <p:spPr>
           <a:xfrm>
-            <a:off x="2194560" y="4389120"/>
-            <a:ext cx="9235440" cy="713232"/>
+            <a:off x="2194560" y="5120640"/>
+            <a:ext cx="9235440" cy="877824"/>
           </a:xfrm>
           <a:prstGeom prst="rect">
             <a:avLst/>
@@ -5564,132 +6344,14 @@
                 <a:latin typeface="微软雅黑"/>
                 <a:ea typeface="微软雅黑"/>
               </a:rPr>
-              <a:t>港大老师或校友讲出海和港股路径；企业之间交换看法；课后由招生老师单独沟通。</a:t>
-            </a:r>
-          </a:p>
-        </p:txBody>
-      </p:sp>
-      <p:sp>
-        <p:nvSpPr>
-          <p:cNvPr id="21" name="Rounded Rectangle 20"/>
-          <p:cNvSpPr/>
-          <p:nvPr/>
-        </p:nvSpPr>
-        <p:spPr>
-          <a:xfrm>
-            <a:off x="457200" y="5193792"/>
-            <a:ext cx="11247120" cy="713232"/>
-          </a:xfrm>
-          <a:prstGeom prst="roundRect">
-            <a:avLst>
-              <a:gd name="adj" fmla="val 8000"/>
-            </a:avLst>
-          </a:prstGeom>
-          <a:solidFill>
-            <a:srgbClr val="F7F4EC"/>
-          </a:solidFill>
-          <a:ln>
-            <a:noFill/>
-          </a:ln>
-          <a:effectLst/>
-        </p:spPr>
-        <p:style>
-          <a:lnRef idx="1">
-            <a:schemeClr val="accent1"/>
-          </a:lnRef>
-          <a:fillRef idx="3">
-            <a:schemeClr val="accent1"/>
-          </a:fillRef>
-          <a:effectRef idx="2">
-            <a:schemeClr val="accent1"/>
-          </a:effectRef>
-          <a:fontRef idx="minor">
-            <a:schemeClr val="lt1"/>
-          </a:fontRef>
-        </p:style>
-        <p:txBody>
-          <a:bodyPr rtlCol="0" anchor="ctr"/>
-          <a:lstStyle/>
-          <a:p>
-            <a:pPr algn="ctr"/>
-          </a:p>
-        </p:txBody>
-      </p:sp>
-      <p:sp>
-        <p:nvSpPr>
-          <p:cNvPr id="22" name="TextBox 21"/>
-          <p:cNvSpPr txBox="1"/>
-          <p:nvPr/>
-        </p:nvSpPr>
-        <p:spPr>
-          <a:xfrm>
-            <a:off x="640080" y="5193792"/>
-            <a:ext cx="1371600" cy="713232"/>
-          </a:xfrm>
-          <a:prstGeom prst="rect">
-            <a:avLst/>
-          </a:prstGeom>
-          <a:noFill/>
-        </p:spPr>
-        <p:txBody>
-          <a:bodyPr wrap="square" anchor="ctr">
-            <a:spAutoFit/>
-          </a:bodyPr>
-          <a:lstStyle/>
-          <a:p>
-            <a:pPr algn="l"/>
-            <a:r>
-              <a:rPr sz="1600" b="1">
-                <a:solidFill>
-                  <a:srgbClr val="003D2E"/>
-                </a:solidFill>
-                <a:latin typeface="微软雅黑"/>
-                <a:ea typeface="微软雅黑"/>
-              </a:rPr>
-              <a:t>分工</a:t>
-            </a:r>
-          </a:p>
-        </p:txBody>
-      </p:sp>
-      <p:sp>
-        <p:nvSpPr>
-          <p:cNvPr id="23" name="TextBox 22"/>
-          <p:cNvSpPr txBox="1"/>
-          <p:nvPr/>
-        </p:nvSpPr>
-        <p:spPr>
-          <a:xfrm>
-            <a:off x="2194560" y="5193792"/>
-            <a:ext cx="9235440" cy="713232"/>
-          </a:xfrm>
-          <a:prstGeom prst="rect">
-            <a:avLst/>
-          </a:prstGeom>
-          <a:noFill/>
-        </p:spPr>
-        <p:txBody>
-          <a:bodyPr wrap="square" anchor="ctr">
-            <a:spAutoFit/>
-          </a:bodyPr>
-          <a:lstStyle/>
-          <a:p>
-            <a:pPr algn="l"/>
-            <a:r>
-              <a:rPr sz="1500" b="0">
-                <a:solidFill>
-                  <a:srgbClr val="1A2420"/>
-                </a:solidFill>
-                <a:latin typeface="微软雅黑"/>
-                <a:ea typeface="微软雅黑"/>
-              </a:rPr>
-              <a:t>中心提供场地、老师、招生安排。我们负责请人、现场和会后把名单整理好交给中心。</a:t>
-            </a:r>
-          </a:p>
-        </p:txBody>
-      </p:sp>
-      <p:sp>
-        <p:nvSpPr>
-          <p:cNvPr id="24" name="TextBox 23"/>
+              <a:t>面试、录取、学位仍由学院决定。我们不承诺录取人数，也不按人头或学费分成。</a:t>
+            </a:r>
+          </a:p>
+        </p:txBody>
+      </p:sp>
+      <p:sp>
+        <p:nvSpPr>
+          <p:cNvPr id="21" name="TextBox 20"/>
           <p:cNvSpPr txBox="1"/>
           <p:nvPr/>
         </p:nvSpPr>
@@ -5860,7 +6522,7 @@
                 <a:latin typeface="微软雅黑"/>
                 <a:ea typeface="微软雅黑"/>
               </a:rPr>
-              <a:t>请中心主任到场</a:t>
+              <a:t>外滩出海专题课</a:t>
             </a:r>
           </a:p>
         </p:txBody>
@@ -5896,7 +6558,7 @@
                 <a:latin typeface="微软雅黑"/>
                 <a:ea typeface="微软雅黑"/>
               </a:rPr>
-              <a:t>5/10</a:t>
+              <a:t>5/11</a:t>
             </a:r>
           </a:p>
         </p:txBody>
@@ -5909,8 +6571,126 @@
         </p:nvSpPr>
         <p:spPr>
           <a:xfrm>
-            <a:off x="457200" y="1280160"/>
-            <a:ext cx="11247120" cy="2011680"/>
+            <a:off x="457200" y="1170432"/>
+            <a:ext cx="11247120" cy="713232"/>
+          </a:xfrm>
+          <a:prstGeom prst="roundRect">
+            <a:avLst>
+              <a:gd name="adj" fmla="val 8000"/>
+            </a:avLst>
+          </a:prstGeom>
+          <a:solidFill>
+            <a:srgbClr val="FFFFFF"/>
+          </a:solidFill>
+          <a:ln>
+            <a:noFill/>
+          </a:ln>
+          <a:effectLst/>
+        </p:spPr>
+        <p:style>
+          <a:lnRef idx="1">
+            <a:schemeClr val="accent1"/>
+          </a:lnRef>
+          <a:fillRef idx="3">
+            <a:schemeClr val="accent1"/>
+          </a:fillRef>
+          <a:effectRef idx="2">
+            <a:schemeClr val="accent1"/>
+          </a:effectRef>
+          <a:fontRef idx="minor">
+            <a:schemeClr val="lt1"/>
+          </a:fontRef>
+        </p:style>
+        <p:txBody>
+          <a:bodyPr rtlCol="0" anchor="ctr"/>
+          <a:lstStyle/>
+          <a:p>
+            <a:pPr algn="ctr"/>
+          </a:p>
+        </p:txBody>
+      </p:sp>
+      <p:sp>
+        <p:nvSpPr>
+          <p:cNvPr id="7" name="TextBox 6"/>
+          <p:cNvSpPr txBox="1"/>
+          <p:nvPr/>
+        </p:nvSpPr>
+        <p:spPr>
+          <a:xfrm>
+            <a:off x="640080" y="1170432"/>
+            <a:ext cx="1371600" cy="713232"/>
+          </a:xfrm>
+          <a:prstGeom prst="rect">
+            <a:avLst/>
+          </a:prstGeom>
+          <a:noFill/>
+        </p:spPr>
+        <p:txBody>
+          <a:bodyPr wrap="square" anchor="ctr">
+            <a:spAutoFit/>
+          </a:bodyPr>
+          <a:lstStyle/>
+          <a:p>
+            <a:pPr algn="l"/>
+            <a:r>
+              <a:rPr sz="1600" b="1">
+                <a:solidFill>
+                  <a:srgbClr val="003D2E"/>
+                </a:solidFill>
+                <a:latin typeface="微软雅黑"/>
+                <a:ea typeface="微软雅黑"/>
+              </a:rPr>
+              <a:t>时间</a:t>
+            </a:r>
+          </a:p>
+        </p:txBody>
+      </p:sp>
+      <p:sp>
+        <p:nvSpPr>
+          <p:cNvPr id="8" name="TextBox 7"/>
+          <p:cNvSpPr txBox="1"/>
+          <p:nvPr/>
+        </p:nvSpPr>
+        <p:spPr>
+          <a:xfrm>
+            <a:off x="2194560" y="1170432"/>
+            <a:ext cx="9235440" cy="713232"/>
+          </a:xfrm>
+          <a:prstGeom prst="rect">
+            <a:avLst/>
+          </a:prstGeom>
+          <a:noFill/>
+        </p:spPr>
+        <p:txBody>
+          <a:bodyPr wrap="square" anchor="ctr">
+            <a:spAutoFit/>
+          </a:bodyPr>
+          <a:lstStyle/>
+          <a:p>
+            <a:pPr algn="l"/>
+            <a:r>
+              <a:rPr sz="1500" b="0">
+                <a:solidFill>
+                  <a:srgbClr val="1A2420"/>
+                </a:solidFill>
+                <a:latin typeface="微软雅黑"/>
+                <a:ea typeface="微软雅黑"/>
+              </a:rPr>
+              <a:t>协议签订后一个月左右，选一个工作日下午，四点左右结束。</a:t>
+            </a:r>
+          </a:p>
+        </p:txBody>
+      </p:sp>
+      <p:sp>
+        <p:nvSpPr>
+          <p:cNvPr id="9" name="Rounded Rectangle 8"/>
+          <p:cNvSpPr/>
+          <p:nvPr/>
+        </p:nvSpPr>
+        <p:spPr>
+          <a:xfrm>
+            <a:off x="457200" y="1975104"/>
+            <a:ext cx="11247120" cy="713232"/>
           </a:xfrm>
           <a:prstGeom prst="roundRect">
             <a:avLst>
@@ -5949,14 +6729,14 @@
       </p:sp>
       <p:sp>
         <p:nvSpPr>
-          <p:cNvPr id="7" name="TextBox 6"/>
+          <p:cNvPr id="10" name="TextBox 9"/>
           <p:cNvSpPr txBox="1"/>
           <p:nvPr/>
         </p:nvSpPr>
         <p:spPr>
           <a:xfrm>
-            <a:off x="731520" y="1463040"/>
-            <a:ext cx="10698480" cy="1691640"/>
+            <a:off x="640080" y="1975104"/>
+            <a:ext cx="1371600" cy="713232"/>
           </a:xfrm>
           <a:prstGeom prst="rect">
             <a:avLst/>
@@ -5971,29 +6751,28 @@
           <a:p>
             <a:pPr algn="l"/>
             <a:r>
-              <a:rPr sz="1800" b="0">
-                <a:solidFill>
-                  <a:srgbClr val="1A2420"/>
-                </a:solidFill>
-                <a:latin typeface="微软雅黑"/>
-                <a:ea typeface="微软雅黑"/>
-              </a:rPr>
-              <a:t>招生和市场是潘老师的工作。若以后还要在学院层面合作，需要中心主任先看过现场。
-我们近期有出海主题的活动，会请总领事或企业负责人到场。希望请潘老师代为邀请主任出席一次。来不来，以中心的安排为准。</a:t>
-            </a:r>
-          </a:p>
-        </p:txBody>
-      </p:sp>
-      <p:sp>
-        <p:nvSpPr>
-          <p:cNvPr id="8" name="TextBox 7"/>
+              <a:rPr sz="1600" b="1">
+                <a:solidFill>
+                  <a:srgbClr val="003D2E"/>
+                </a:solidFill>
+                <a:latin typeface="微软雅黑"/>
+                <a:ea typeface="微软雅黑"/>
+              </a:rPr>
+              <a:t>地点</a:t>
+            </a:r>
+          </a:p>
+        </p:txBody>
+      </p:sp>
+      <p:sp>
+        <p:nvSpPr>
+          <p:cNvPr id="11" name="TextBox 10"/>
           <p:cNvSpPr txBox="1"/>
           <p:nvPr/>
         </p:nvSpPr>
         <p:spPr>
           <a:xfrm>
-            <a:off x="640080" y="3566160"/>
-            <a:ext cx="10972800" cy="2560320"/>
+            <a:off x="2194560" y="1975104"/>
+            <a:ext cx="9235440" cy="713232"/>
           </a:xfrm>
           <a:prstGeom prst="rect">
             <a:avLst/>
@@ -6001,105 +6780,500 @@
           <a:noFill/>
         </p:spPr>
         <p:txBody>
-          <a:bodyPr wrap="square">
+          <a:bodyPr wrap="square" anchor="ctr">
             <a:spAutoFit/>
           </a:bodyPr>
           <a:lstStyle/>
           <a:p>
-            <a:pPr>
-              <a:lnSpc>
-                <a:spcPct val="120000"/>
-              </a:lnSpc>
-              <a:spcAft>
-                <a:spcPts val="1200"/>
-              </a:spcAft>
-            </a:pPr>
-            <a:r>
-              <a:rPr sz="1700" b="1">
-                <a:solidFill>
-                  <a:srgbClr val="C4A35A"/>
-                </a:solidFill>
-                <a:latin typeface="微软雅黑"/>
-                <a:ea typeface="微软雅黑"/>
-              </a:rPr>
-              <a:t>·  </a:t>
-            </a:r>
-            <a:r>
-              <a:rPr sz="1700" b="0">
+            <a:pPr algn="l"/>
+            <a:r>
+              <a:rPr sz="1500" b="0">
                 <a:solidFill>
                   <a:srgbClr val="1A2420"/>
                 </a:solidFill>
                 <a:latin typeface="微软雅黑"/>
                 <a:ea typeface="微软雅黑"/>
               </a:rPr>
-              <a:t>我们发出书面邀请，写明时间、地点和到场嘉宾。</a:t>
-            </a:r>
-          </a:p>
-          <a:p>
-            <a:pPr>
-              <a:lnSpc>
-                <a:spcPct val="120000"/>
-              </a:lnSpc>
-              <a:spcAft>
-                <a:spcPts val="1200"/>
-              </a:spcAft>
-            </a:pPr>
-            <a:r>
-              <a:rPr sz="1700" b="1">
-                <a:solidFill>
-                  <a:srgbClr val="C4A35A"/>
-                </a:solidFill>
-                <a:latin typeface="微软雅黑"/>
-                <a:ea typeface="微软雅黑"/>
-              </a:rPr>
-              <a:t>·  </a:t>
-            </a:r>
-            <a:r>
-              <a:rPr sz="1700" b="0">
+              <a:t>香港大学经管学院上海中心，外滩 SOHO F 栋。</a:t>
+            </a:r>
+          </a:p>
+        </p:txBody>
+      </p:sp>
+      <p:sp>
+        <p:nvSpPr>
+          <p:cNvPr id="12" name="Rounded Rectangle 11"/>
+          <p:cNvSpPr/>
+          <p:nvPr/>
+        </p:nvSpPr>
+        <p:spPr>
+          <a:xfrm>
+            <a:off x="457200" y="2779776"/>
+            <a:ext cx="11247120" cy="713232"/>
+          </a:xfrm>
+          <a:prstGeom prst="roundRect">
+            <a:avLst>
+              <a:gd name="adj" fmla="val 8000"/>
+            </a:avLst>
+          </a:prstGeom>
+          <a:solidFill>
+            <a:srgbClr val="FFFFFF"/>
+          </a:solidFill>
+          <a:ln>
+            <a:noFill/>
+          </a:ln>
+          <a:effectLst/>
+        </p:spPr>
+        <p:style>
+          <a:lnRef idx="1">
+            <a:schemeClr val="accent1"/>
+          </a:lnRef>
+          <a:fillRef idx="3">
+            <a:schemeClr val="accent1"/>
+          </a:fillRef>
+          <a:effectRef idx="2">
+            <a:schemeClr val="accent1"/>
+          </a:effectRef>
+          <a:fontRef idx="minor">
+            <a:schemeClr val="lt1"/>
+          </a:fontRef>
+        </p:style>
+        <p:txBody>
+          <a:bodyPr rtlCol="0" anchor="ctr"/>
+          <a:lstStyle/>
+          <a:p>
+            <a:pPr algn="ctr"/>
+          </a:p>
+        </p:txBody>
+      </p:sp>
+      <p:sp>
+        <p:nvSpPr>
+          <p:cNvPr id="13" name="TextBox 12"/>
+          <p:cNvSpPr txBox="1"/>
+          <p:nvPr/>
+        </p:nvSpPr>
+        <p:spPr>
+          <a:xfrm>
+            <a:off x="640080" y="2779776"/>
+            <a:ext cx="1371600" cy="713232"/>
+          </a:xfrm>
+          <a:prstGeom prst="rect">
+            <a:avLst/>
+          </a:prstGeom>
+          <a:noFill/>
+        </p:spPr>
+        <p:txBody>
+          <a:bodyPr wrap="square" anchor="ctr">
+            <a:spAutoFit/>
+          </a:bodyPr>
+          <a:lstStyle/>
+          <a:p>
+            <a:pPr algn="l"/>
+            <a:r>
+              <a:rPr sz="1600" b="1">
+                <a:solidFill>
+                  <a:srgbClr val="003D2E"/>
+                </a:solidFill>
+                <a:latin typeface="微软雅黑"/>
+                <a:ea typeface="微软雅黑"/>
+              </a:rPr>
+              <a:t>人数</a:t>
+            </a:r>
+          </a:p>
+        </p:txBody>
+      </p:sp>
+      <p:sp>
+        <p:nvSpPr>
+          <p:cNvPr id="14" name="TextBox 13"/>
+          <p:cNvSpPr txBox="1"/>
+          <p:nvPr/>
+        </p:nvSpPr>
+        <p:spPr>
+          <a:xfrm>
+            <a:off x="2194560" y="2779776"/>
+            <a:ext cx="9235440" cy="713232"/>
+          </a:xfrm>
+          <a:prstGeom prst="rect">
+            <a:avLst/>
+          </a:prstGeom>
+          <a:noFill/>
+        </p:spPr>
+        <p:txBody>
+          <a:bodyPr wrap="square" anchor="ctr">
+            <a:spAutoFit/>
+          </a:bodyPr>
+          <a:lstStyle/>
+          <a:p>
+            <a:pPr algn="l"/>
+            <a:r>
+              <a:rPr sz="1500" b="0">
                 <a:solidFill>
                   <a:srgbClr val="1A2420"/>
                 </a:solidFill>
                 <a:latin typeface="微软雅黑"/>
                 <a:ea typeface="微软雅黑"/>
               </a:rPr>
-              <a:t>主任因公务不能来，不影响这一项算已完成。</a:t>
-            </a:r>
-          </a:p>
-          <a:p>
-            <a:pPr>
-              <a:lnSpc>
-                <a:spcPct val="120000"/>
-              </a:lnSpc>
-              <a:spcAft>
-                <a:spcPts val="1200"/>
-              </a:spcAft>
-            </a:pPr>
-            <a:r>
-              <a:rPr sz="1700" b="1">
-                <a:solidFill>
-                  <a:srgbClr val="C4A35A"/>
-                </a:solidFill>
-                <a:latin typeface="微软雅黑"/>
-                <a:ea typeface="微软雅黑"/>
-              </a:rPr>
-              <a:t>·  </a:t>
-            </a:r>
-            <a:r>
-              <a:rPr sz="1700" b="0">
+              <a:t>三十到四十人。同时就是上面说的招生现场，不另办说明会。</a:t>
+            </a:r>
+          </a:p>
+        </p:txBody>
+      </p:sp>
+      <p:sp>
+        <p:nvSpPr>
+          <p:cNvPr id="15" name="Rounded Rectangle 14"/>
+          <p:cNvSpPr/>
+          <p:nvPr/>
+        </p:nvSpPr>
+        <p:spPr>
+          <a:xfrm>
+            <a:off x="457200" y="3584448"/>
+            <a:ext cx="11247120" cy="713232"/>
+          </a:xfrm>
+          <a:prstGeom prst="roundRect">
+            <a:avLst>
+              <a:gd name="adj" fmla="val 8000"/>
+            </a:avLst>
+          </a:prstGeom>
+          <a:solidFill>
+            <a:srgbClr val="F7F4EC"/>
+          </a:solidFill>
+          <a:ln>
+            <a:noFill/>
+          </a:ln>
+          <a:effectLst/>
+        </p:spPr>
+        <p:style>
+          <a:lnRef idx="1">
+            <a:schemeClr val="accent1"/>
+          </a:lnRef>
+          <a:fillRef idx="3">
+            <a:schemeClr val="accent1"/>
+          </a:fillRef>
+          <a:effectRef idx="2">
+            <a:schemeClr val="accent1"/>
+          </a:effectRef>
+          <a:fontRef idx="minor">
+            <a:schemeClr val="lt1"/>
+          </a:fontRef>
+        </p:style>
+        <p:txBody>
+          <a:bodyPr rtlCol="0" anchor="ctr"/>
+          <a:lstStyle/>
+          <a:p>
+            <a:pPr algn="ctr"/>
+          </a:p>
+        </p:txBody>
+      </p:sp>
+      <p:sp>
+        <p:nvSpPr>
+          <p:cNvPr id="16" name="TextBox 15"/>
+          <p:cNvSpPr txBox="1"/>
+          <p:nvPr/>
+        </p:nvSpPr>
+        <p:spPr>
+          <a:xfrm>
+            <a:off x="640080" y="3584448"/>
+            <a:ext cx="1371600" cy="713232"/>
+          </a:xfrm>
+          <a:prstGeom prst="rect">
+            <a:avLst/>
+          </a:prstGeom>
+          <a:noFill/>
+        </p:spPr>
+        <p:txBody>
+          <a:bodyPr wrap="square" anchor="ctr">
+            <a:spAutoFit/>
+          </a:bodyPr>
+          <a:lstStyle/>
+          <a:p>
+            <a:pPr algn="l"/>
+            <a:r>
+              <a:rPr sz="1600" b="1">
+                <a:solidFill>
+                  <a:srgbClr val="003D2E"/>
+                </a:solidFill>
+                <a:latin typeface="微软雅黑"/>
+                <a:ea typeface="微软雅黑"/>
+              </a:rPr>
+              <a:t>来宾</a:t>
+            </a:r>
+          </a:p>
+        </p:txBody>
+      </p:sp>
+      <p:sp>
+        <p:nvSpPr>
+          <p:cNvPr id="17" name="TextBox 16"/>
+          <p:cNvSpPr txBox="1"/>
+          <p:nvPr/>
+        </p:nvSpPr>
+        <p:spPr>
+          <a:xfrm>
+            <a:off x="2194560" y="3584448"/>
+            <a:ext cx="9235440" cy="713232"/>
+          </a:xfrm>
+          <a:prstGeom prst="rect">
+            <a:avLst/>
+          </a:prstGeom>
+          <a:noFill/>
+        </p:spPr>
+        <p:txBody>
+          <a:bodyPr wrap="square" anchor="ctr">
+            <a:spAutoFit/>
+          </a:bodyPr>
+          <a:lstStyle/>
+          <a:p>
+            <a:pPr algn="l"/>
+            <a:r>
+              <a:rPr sz="1500" b="0">
                 <a:solidFill>
                   <a:srgbClr val="1A2420"/>
                 </a:solidFill>
                 <a:latin typeface="微软雅黑"/>
                 <a:ea typeface="微软雅黑"/>
               </a:rPr>
-              <a:t>这一次不另收费，算在下面写的八万八千元里面。</a:t>
-            </a:r>
-          </a:p>
-        </p:txBody>
-      </p:sp>
-      <p:sp>
-        <p:nvSpPr>
-          <p:cNvPr id="9" name="TextBox 8"/>
+              <a:t>正在考虑出海或赴港上市、且符合 EMBA 初筛的企业负责人。</a:t>
+            </a:r>
+          </a:p>
+        </p:txBody>
+      </p:sp>
+      <p:sp>
+        <p:nvSpPr>
+          <p:cNvPr id="18" name="Rounded Rectangle 17"/>
+          <p:cNvSpPr/>
+          <p:nvPr/>
+        </p:nvSpPr>
+        <p:spPr>
+          <a:xfrm>
+            <a:off x="457200" y="4389120"/>
+            <a:ext cx="11247120" cy="713232"/>
+          </a:xfrm>
+          <a:prstGeom prst="roundRect">
+            <a:avLst>
+              <a:gd name="adj" fmla="val 8000"/>
+            </a:avLst>
+          </a:prstGeom>
+          <a:solidFill>
+            <a:srgbClr val="FFFFFF"/>
+          </a:solidFill>
+          <a:ln>
+            <a:noFill/>
+          </a:ln>
+          <a:effectLst/>
+        </p:spPr>
+        <p:style>
+          <a:lnRef idx="1">
+            <a:schemeClr val="accent1"/>
+          </a:lnRef>
+          <a:fillRef idx="3">
+            <a:schemeClr val="accent1"/>
+          </a:fillRef>
+          <a:effectRef idx="2">
+            <a:schemeClr val="accent1"/>
+          </a:effectRef>
+          <a:fontRef idx="minor">
+            <a:schemeClr val="lt1"/>
+          </a:fontRef>
+        </p:style>
+        <p:txBody>
+          <a:bodyPr rtlCol="0" anchor="ctr"/>
+          <a:lstStyle/>
+          <a:p>
+            <a:pPr algn="ctr"/>
+          </a:p>
+        </p:txBody>
+      </p:sp>
+      <p:sp>
+        <p:nvSpPr>
+          <p:cNvPr id="19" name="TextBox 18"/>
+          <p:cNvSpPr txBox="1"/>
+          <p:nvPr/>
+        </p:nvSpPr>
+        <p:spPr>
+          <a:xfrm>
+            <a:off x="640080" y="4389120"/>
+            <a:ext cx="1371600" cy="713232"/>
+          </a:xfrm>
+          <a:prstGeom prst="rect">
+            <a:avLst/>
+          </a:prstGeom>
+          <a:noFill/>
+        </p:spPr>
+        <p:txBody>
+          <a:bodyPr wrap="square" anchor="ctr">
+            <a:spAutoFit/>
+          </a:bodyPr>
+          <a:lstStyle/>
+          <a:p>
+            <a:pPr algn="l"/>
+            <a:r>
+              <a:rPr sz="1600" b="1">
+                <a:solidFill>
+                  <a:srgbClr val="003D2E"/>
+                </a:solidFill>
+                <a:latin typeface="微软雅黑"/>
+                <a:ea typeface="微软雅黑"/>
+              </a:rPr>
+              <a:t>内容</a:t>
+            </a:r>
+          </a:p>
+        </p:txBody>
+      </p:sp>
+      <p:sp>
+        <p:nvSpPr>
+          <p:cNvPr id="20" name="TextBox 19"/>
+          <p:cNvSpPr txBox="1"/>
+          <p:nvPr/>
+        </p:nvSpPr>
+        <p:spPr>
+          <a:xfrm>
+            <a:off x="2194560" y="4389120"/>
+            <a:ext cx="9235440" cy="713232"/>
+          </a:xfrm>
+          <a:prstGeom prst="rect">
+            <a:avLst/>
+          </a:prstGeom>
+          <a:noFill/>
+        </p:spPr>
+        <p:txBody>
+          <a:bodyPr wrap="square" anchor="ctr">
+            <a:spAutoFit/>
+          </a:bodyPr>
+          <a:lstStyle/>
+          <a:p>
+            <a:pPr algn="l"/>
+            <a:r>
+              <a:rPr sz="1500" b="0">
+                <a:solidFill>
+                  <a:srgbClr val="1A2420"/>
+                </a:solidFill>
+                <a:latin typeface="微软雅黑"/>
+                <a:ea typeface="微软雅黑"/>
+              </a:rPr>
+              <a:t>港大老师或校友讲出海和港股路径；企业之间交换看法；课后由招生老师单独沟通。</a:t>
+            </a:r>
+          </a:p>
+        </p:txBody>
+      </p:sp>
+      <p:sp>
+        <p:nvSpPr>
+          <p:cNvPr id="21" name="Rounded Rectangle 20"/>
+          <p:cNvSpPr/>
+          <p:nvPr/>
+        </p:nvSpPr>
+        <p:spPr>
+          <a:xfrm>
+            <a:off x="457200" y="5193792"/>
+            <a:ext cx="11247120" cy="713232"/>
+          </a:xfrm>
+          <a:prstGeom prst="roundRect">
+            <a:avLst>
+              <a:gd name="adj" fmla="val 8000"/>
+            </a:avLst>
+          </a:prstGeom>
+          <a:solidFill>
+            <a:srgbClr val="F7F4EC"/>
+          </a:solidFill>
+          <a:ln>
+            <a:noFill/>
+          </a:ln>
+          <a:effectLst/>
+        </p:spPr>
+        <p:style>
+          <a:lnRef idx="1">
+            <a:schemeClr val="accent1"/>
+          </a:lnRef>
+          <a:fillRef idx="3">
+            <a:schemeClr val="accent1"/>
+          </a:fillRef>
+          <a:effectRef idx="2">
+            <a:schemeClr val="accent1"/>
+          </a:effectRef>
+          <a:fontRef idx="minor">
+            <a:schemeClr val="lt1"/>
+          </a:fontRef>
+        </p:style>
+        <p:txBody>
+          <a:bodyPr rtlCol="0" anchor="ctr"/>
+          <a:lstStyle/>
+          <a:p>
+            <a:pPr algn="ctr"/>
+          </a:p>
+        </p:txBody>
+      </p:sp>
+      <p:sp>
+        <p:nvSpPr>
+          <p:cNvPr id="22" name="TextBox 21"/>
+          <p:cNvSpPr txBox="1"/>
+          <p:nvPr/>
+        </p:nvSpPr>
+        <p:spPr>
+          <a:xfrm>
+            <a:off x="640080" y="5193792"/>
+            <a:ext cx="1371600" cy="713232"/>
+          </a:xfrm>
+          <a:prstGeom prst="rect">
+            <a:avLst/>
+          </a:prstGeom>
+          <a:noFill/>
+        </p:spPr>
+        <p:txBody>
+          <a:bodyPr wrap="square" anchor="ctr">
+            <a:spAutoFit/>
+          </a:bodyPr>
+          <a:lstStyle/>
+          <a:p>
+            <a:pPr algn="l"/>
+            <a:r>
+              <a:rPr sz="1600" b="1">
+                <a:solidFill>
+                  <a:srgbClr val="003D2E"/>
+                </a:solidFill>
+                <a:latin typeface="微软雅黑"/>
+                <a:ea typeface="微软雅黑"/>
+              </a:rPr>
+              <a:t>分工</a:t>
+            </a:r>
+          </a:p>
+        </p:txBody>
+      </p:sp>
+      <p:sp>
+        <p:nvSpPr>
+          <p:cNvPr id="23" name="TextBox 22"/>
+          <p:cNvSpPr txBox="1"/>
+          <p:nvPr/>
+        </p:nvSpPr>
+        <p:spPr>
+          <a:xfrm>
+            <a:off x="2194560" y="5193792"/>
+            <a:ext cx="9235440" cy="713232"/>
+          </a:xfrm>
+          <a:prstGeom prst="rect">
+            <a:avLst/>
+          </a:prstGeom>
+          <a:noFill/>
+        </p:spPr>
+        <p:txBody>
+          <a:bodyPr wrap="square" anchor="ctr">
+            <a:spAutoFit/>
+          </a:bodyPr>
+          <a:lstStyle/>
+          <a:p>
+            <a:pPr algn="l"/>
+            <a:r>
+              <a:rPr sz="1500" b="0">
+                <a:solidFill>
+                  <a:srgbClr val="1A2420"/>
+                </a:solidFill>
+                <a:latin typeface="微软雅黑"/>
+                <a:ea typeface="微软雅黑"/>
+              </a:rPr>
+              <a:t>中心提供场地、老师、招生安排。我们负责请人、现场，会后把名单整理好交给中心。</a:t>
+            </a:r>
+          </a:p>
+        </p:txBody>
+      </p:sp>
+      <p:sp>
+        <p:nvSpPr>
+          <p:cNvPr id="24" name="TextBox 23"/>
           <p:cNvSpPr txBox="1"/>
           <p:nvPr/>
         </p:nvSpPr>
@@ -6270,7 +7444,7 @@
                 <a:latin typeface="微软雅黑"/>
                 <a:ea typeface="微软雅黑"/>
               </a:rPr>
-              <a:t>九十天怎么排</a:t>
+              <a:t>请中心主任到场（含在同一笔费用里）</a:t>
             </a:r>
           </a:p>
         </p:txBody>
@@ -6306,7 +7480,7 @@
                 <a:latin typeface="微软雅黑"/>
                 <a:ea typeface="微软雅黑"/>
               </a:rPr>
-              <a:t>6/10</a:t>
+              <a:t>6/11</a:t>
             </a:r>
           </a:p>
         </p:txBody>
@@ -6319,8 +7493,8 @@
         </p:nvSpPr>
         <p:spPr>
           <a:xfrm>
-            <a:off x="457200" y="1234440"/>
-            <a:ext cx="11247120" cy="1051560"/>
+            <a:off x="457200" y="1207008"/>
+            <a:ext cx="11247120" cy="1874519"/>
           </a:xfrm>
           <a:prstGeom prst="roundRect">
             <a:avLst>
@@ -6328,7 +7502,7 @@
             </a:avLst>
           </a:prstGeom>
           <a:solidFill>
-            <a:srgbClr val="FFFFFF"/>
+            <a:srgbClr val="F7F4EC"/>
           </a:solidFill>
           <a:ln>
             <a:noFill/>
@@ -6359,58 +7533,14 @@
       </p:sp>
       <p:sp>
         <p:nvSpPr>
-          <p:cNvPr id="7" name="Rectangle 6"/>
-          <p:cNvSpPr/>
-          <p:nvPr/>
-        </p:nvSpPr>
-        <p:spPr>
-          <a:xfrm>
-            <a:off x="457200" y="1234440"/>
-            <a:ext cx="2194560" cy="1051560"/>
-          </a:xfrm>
-          <a:prstGeom prst="rect">
-            <a:avLst/>
-          </a:prstGeom>
-          <a:solidFill>
-            <a:srgbClr val="003D2E"/>
-          </a:solidFill>
-          <a:ln>
-            <a:noFill/>
-          </a:ln>
-          <a:effectLst/>
-        </p:spPr>
-        <p:style>
-          <a:lnRef idx="1">
-            <a:schemeClr val="accent1"/>
-          </a:lnRef>
-          <a:fillRef idx="3">
-            <a:schemeClr val="accent1"/>
-          </a:fillRef>
-          <a:effectRef idx="2">
-            <a:schemeClr val="accent1"/>
-          </a:effectRef>
-          <a:fontRef idx="minor">
-            <a:schemeClr val="lt1"/>
-          </a:fontRef>
-        </p:style>
-        <p:txBody>
-          <a:bodyPr rtlCol="0" anchor="ctr"/>
-          <a:lstStyle/>
-          <a:p>
-            <a:pPr algn="ctr"/>
-          </a:p>
-        </p:txBody>
-      </p:sp>
-      <p:sp>
-        <p:nvSpPr>
-          <p:cNvPr id="8" name="TextBox 7"/>
+          <p:cNvPr id="7" name="TextBox 6"/>
           <p:cNvSpPr txBox="1"/>
           <p:nvPr/>
         </p:nvSpPr>
         <p:spPr>
           <a:xfrm>
-            <a:off x="457200" y="1234440"/>
-            <a:ext cx="2194560" cy="1051560"/>
+            <a:off x="731520" y="1353312"/>
+            <a:ext cx="10698480" cy="1600200"/>
           </a:xfrm>
           <a:prstGeom prst="rect">
             <a:avLst/>
@@ -6423,30 +7553,31 @@
           </a:bodyPr>
           <a:lstStyle/>
           <a:p>
-            <a:pPr algn="ctr"/>
-            <a:r>
-              <a:rPr sz="1800" b="1">
-                <a:solidFill>
-                  <a:srgbClr val="FFFFFF"/>
-                </a:solidFill>
-                <a:latin typeface="微软雅黑"/>
-                <a:ea typeface="微软雅黑"/>
-              </a:rPr>
-              <a:t>第 1 周</a:t>
-            </a:r>
-          </a:p>
-        </p:txBody>
-      </p:sp>
-      <p:sp>
-        <p:nvSpPr>
-          <p:cNvPr id="9" name="TextBox 8"/>
+            <a:pPr algn="l"/>
+            <a:r>
+              <a:rPr sz="1700" b="0">
+                <a:solidFill>
+                  <a:srgbClr val="1A2420"/>
+                </a:solidFill>
+                <a:latin typeface="微软雅黑"/>
+                <a:ea typeface="微软雅黑"/>
+              </a:rPr>
+              <a:t>这一项不是单独向中心报价。八万八千元买的是前面的 EMBA 招生和外滩出海课；请主任到场含在里面，不另收费。
+我们近期有出海主题活动，会请总领事或企业负责人到场。希望请潘老师代为邀请主任出席一次，直接看到我们请到的人和现场。来不来，以中心的安排为准。</a:t>
+            </a:r>
+          </a:p>
+        </p:txBody>
+      </p:sp>
+      <p:sp>
+        <p:nvSpPr>
+          <p:cNvPr id="8" name="TextBox 7"/>
           <p:cNvSpPr txBox="1"/>
           <p:nvPr/>
         </p:nvSpPr>
         <p:spPr>
           <a:xfrm>
-            <a:off x="2880360" y="1234440"/>
-            <a:ext cx="8595360" cy="1051560"/>
+            <a:off x="640080" y="3291840"/>
+            <a:ext cx="10972800" cy="2926080"/>
           </a:xfrm>
           <a:prstGeom prst="rect">
             <a:avLst/>
@@ -6454,12 +7585,29 @@
           <a:noFill/>
         </p:spPr>
         <p:txBody>
-          <a:bodyPr wrap="square" anchor="ctr">
+          <a:bodyPr wrap="square">
             <a:spAutoFit/>
           </a:bodyPr>
           <a:lstStyle/>
           <a:p>
-            <a:pPr algn="l"/>
+            <a:pPr>
+              <a:lnSpc>
+                <a:spcPct val="120000"/>
+              </a:lnSpc>
+              <a:spcAft>
+                <a:spcPts val="1200"/>
+              </a:spcAft>
+            </a:pPr>
+            <a:r>
+              <a:rPr sz="1700" b="1">
+                <a:solidFill>
+                  <a:srgbClr val="C4A35A"/>
+                </a:solidFill>
+                <a:latin typeface="微软雅黑"/>
+                <a:ea typeface="微软雅黑"/>
+              </a:rPr>
+              <a:t>·  </a:t>
+            </a:r>
             <a:r>
               <a:rPr sz="1700" b="0">
                 <a:solidFill>
@@ -6468,160 +7616,28 @@
                 <a:latin typeface="微软雅黑"/>
                 <a:ea typeface="微软雅黑"/>
               </a:rPr>
-              <a:t>签订协议，支付费用，把外滩那场的日期定下来。</a:t>
-            </a:r>
-          </a:p>
-        </p:txBody>
-      </p:sp>
-      <p:sp>
-        <p:nvSpPr>
-          <p:cNvPr id="10" name="Rounded Rectangle 9"/>
-          <p:cNvSpPr/>
-          <p:nvPr/>
-        </p:nvSpPr>
-        <p:spPr>
-          <a:xfrm>
-            <a:off x="457200" y="2423160"/>
-            <a:ext cx="11247120" cy="1051560"/>
-          </a:xfrm>
-          <a:prstGeom prst="roundRect">
-            <a:avLst>
-              <a:gd name="adj" fmla="val 8000"/>
-            </a:avLst>
-          </a:prstGeom>
-          <a:solidFill>
-            <a:srgbClr val="FFFFFF"/>
-          </a:solidFill>
-          <a:ln>
-            <a:noFill/>
-          </a:ln>
-          <a:effectLst/>
-        </p:spPr>
-        <p:style>
-          <a:lnRef idx="1">
-            <a:schemeClr val="accent1"/>
-          </a:lnRef>
-          <a:fillRef idx="3">
-            <a:schemeClr val="accent1"/>
-          </a:fillRef>
-          <a:effectRef idx="2">
-            <a:schemeClr val="accent1"/>
-          </a:effectRef>
-          <a:fontRef idx="minor">
-            <a:schemeClr val="lt1"/>
-          </a:fontRef>
-        </p:style>
-        <p:txBody>
-          <a:bodyPr rtlCol="0" anchor="ctr"/>
-          <a:lstStyle/>
-          <a:p>
-            <a:pPr algn="ctr"/>
-          </a:p>
-        </p:txBody>
-      </p:sp>
-      <p:sp>
-        <p:nvSpPr>
-          <p:cNvPr id="11" name="Rectangle 10"/>
-          <p:cNvSpPr/>
-          <p:nvPr/>
-        </p:nvSpPr>
-        <p:spPr>
-          <a:xfrm>
-            <a:off x="457200" y="2423160"/>
-            <a:ext cx="2194560" cy="1051560"/>
-          </a:xfrm>
-          <a:prstGeom prst="rect">
-            <a:avLst/>
-          </a:prstGeom>
-          <a:solidFill>
-            <a:srgbClr val="003D2E"/>
-          </a:solidFill>
-          <a:ln>
-            <a:noFill/>
-          </a:ln>
-          <a:effectLst/>
-        </p:spPr>
-        <p:style>
-          <a:lnRef idx="1">
-            <a:schemeClr val="accent1"/>
-          </a:lnRef>
-          <a:fillRef idx="3">
-            <a:schemeClr val="accent1"/>
-          </a:fillRef>
-          <a:effectRef idx="2">
-            <a:schemeClr val="accent1"/>
-          </a:effectRef>
-          <a:fontRef idx="minor">
-            <a:schemeClr val="lt1"/>
-          </a:fontRef>
-        </p:style>
-        <p:txBody>
-          <a:bodyPr rtlCol="0" anchor="ctr"/>
-          <a:lstStyle/>
-          <a:p>
-            <a:pPr algn="ctr"/>
-          </a:p>
-        </p:txBody>
-      </p:sp>
-      <p:sp>
-        <p:nvSpPr>
-          <p:cNvPr id="12" name="TextBox 11"/>
-          <p:cNvSpPr txBox="1"/>
-          <p:nvPr/>
-        </p:nvSpPr>
-        <p:spPr>
-          <a:xfrm>
-            <a:off x="457200" y="2423160"/>
-            <a:ext cx="2194560" cy="1051560"/>
-          </a:xfrm>
-          <a:prstGeom prst="rect">
-            <a:avLst/>
-          </a:prstGeom>
-          <a:noFill/>
-        </p:spPr>
-        <p:txBody>
-          <a:bodyPr wrap="square" anchor="ctr">
-            <a:spAutoFit/>
-          </a:bodyPr>
-          <a:lstStyle/>
-          <a:p>
-            <a:pPr algn="ctr"/>
-            <a:r>
-              <a:rPr sz="1800" b="1">
-                <a:solidFill>
-                  <a:srgbClr val="FFFFFF"/>
-                </a:solidFill>
-                <a:latin typeface="微软雅黑"/>
-                <a:ea typeface="微软雅黑"/>
-              </a:rPr>
-              <a:t>第 2–3 周</a:t>
-            </a:r>
-          </a:p>
-        </p:txBody>
-      </p:sp>
-      <p:sp>
-        <p:nvSpPr>
-          <p:cNvPr id="13" name="TextBox 12"/>
-          <p:cNvSpPr txBox="1"/>
-          <p:nvPr/>
-        </p:nvSpPr>
-        <p:spPr>
-          <a:xfrm>
-            <a:off x="2880360" y="2423160"/>
-            <a:ext cx="8595360" cy="1051560"/>
-          </a:xfrm>
-          <a:prstGeom prst="rect">
-            <a:avLst/>
-          </a:prstGeom>
-          <a:noFill/>
-        </p:spPr>
-        <p:txBody>
-          <a:bodyPr wrap="square" anchor="ctr">
-            <a:spAutoFit/>
-          </a:bodyPr>
-          <a:lstStyle/>
-          <a:p>
-            <a:pPr algn="l"/>
+              <a:t>我们发出书面邀请，写明时间、地点和到场嘉宾。</a:t>
+            </a:r>
+          </a:p>
+          <a:p>
+            <a:pPr>
+              <a:lnSpc>
+                <a:spcPct val="120000"/>
+              </a:lnSpc>
+              <a:spcAft>
+                <a:spcPts val="1200"/>
+              </a:spcAft>
+            </a:pPr>
+            <a:r>
+              <a:rPr sz="1700" b="1">
+                <a:solidFill>
+                  <a:srgbClr val="C4A35A"/>
+                </a:solidFill>
+                <a:latin typeface="微软雅黑"/>
+                <a:ea typeface="微软雅黑"/>
+              </a:rPr>
+              <a:t>·  </a:t>
+            </a:r>
             <a:r>
               <a:rPr sz="1700" b="0">
                 <a:solidFill>
@@ -6630,160 +7646,28 @@
                 <a:latin typeface="微软雅黑"/>
                 <a:ea typeface="微软雅黑"/>
               </a:rPr>
-              <a:t>拿出拟邀请名单，不少于八十人，双方看过再定。</a:t>
-            </a:r>
-          </a:p>
-        </p:txBody>
-      </p:sp>
-      <p:sp>
-        <p:nvSpPr>
-          <p:cNvPr id="14" name="Rounded Rectangle 13"/>
-          <p:cNvSpPr/>
-          <p:nvPr/>
-        </p:nvSpPr>
-        <p:spPr>
-          <a:xfrm>
-            <a:off x="457200" y="3611880"/>
-            <a:ext cx="11247120" cy="1051560"/>
-          </a:xfrm>
-          <a:prstGeom prst="roundRect">
-            <a:avLst>
-              <a:gd name="adj" fmla="val 8000"/>
-            </a:avLst>
-          </a:prstGeom>
-          <a:solidFill>
-            <a:srgbClr val="FFFFFF"/>
-          </a:solidFill>
-          <a:ln>
-            <a:noFill/>
-          </a:ln>
-          <a:effectLst/>
-        </p:spPr>
-        <p:style>
-          <a:lnRef idx="1">
-            <a:schemeClr val="accent1"/>
-          </a:lnRef>
-          <a:fillRef idx="3">
-            <a:schemeClr val="accent1"/>
-          </a:fillRef>
-          <a:effectRef idx="2">
-            <a:schemeClr val="accent1"/>
-          </a:effectRef>
-          <a:fontRef idx="minor">
-            <a:schemeClr val="lt1"/>
-          </a:fontRef>
-        </p:style>
-        <p:txBody>
-          <a:bodyPr rtlCol="0" anchor="ctr"/>
-          <a:lstStyle/>
-          <a:p>
-            <a:pPr algn="ctr"/>
-          </a:p>
-        </p:txBody>
-      </p:sp>
-      <p:sp>
-        <p:nvSpPr>
-          <p:cNvPr id="15" name="Rectangle 14"/>
-          <p:cNvSpPr/>
-          <p:nvPr/>
-        </p:nvSpPr>
-        <p:spPr>
-          <a:xfrm>
-            <a:off x="457200" y="3611880"/>
-            <a:ext cx="2194560" cy="1051560"/>
-          </a:xfrm>
-          <a:prstGeom prst="rect">
-            <a:avLst/>
-          </a:prstGeom>
-          <a:solidFill>
-            <a:srgbClr val="003D2E"/>
-          </a:solidFill>
-          <a:ln>
-            <a:noFill/>
-          </a:ln>
-          <a:effectLst/>
-        </p:spPr>
-        <p:style>
-          <a:lnRef idx="1">
-            <a:schemeClr val="accent1"/>
-          </a:lnRef>
-          <a:fillRef idx="3">
-            <a:schemeClr val="accent1"/>
-          </a:fillRef>
-          <a:effectRef idx="2">
-            <a:schemeClr val="accent1"/>
-          </a:effectRef>
-          <a:fontRef idx="minor">
-            <a:schemeClr val="lt1"/>
-          </a:fontRef>
-        </p:style>
-        <p:txBody>
-          <a:bodyPr rtlCol="0" anchor="ctr"/>
-          <a:lstStyle/>
-          <a:p>
-            <a:pPr algn="ctr"/>
-          </a:p>
-        </p:txBody>
-      </p:sp>
-      <p:sp>
-        <p:nvSpPr>
-          <p:cNvPr id="16" name="TextBox 15"/>
-          <p:cNvSpPr txBox="1"/>
-          <p:nvPr/>
-        </p:nvSpPr>
-        <p:spPr>
-          <a:xfrm>
-            <a:off x="457200" y="3611880"/>
-            <a:ext cx="2194560" cy="1051560"/>
-          </a:xfrm>
-          <a:prstGeom prst="rect">
-            <a:avLst/>
-          </a:prstGeom>
-          <a:noFill/>
-        </p:spPr>
-        <p:txBody>
-          <a:bodyPr wrap="square" anchor="ctr">
-            <a:spAutoFit/>
-          </a:bodyPr>
-          <a:lstStyle/>
-          <a:p>
-            <a:pPr algn="ctr"/>
-            <a:r>
-              <a:rPr sz="1800" b="1">
-                <a:solidFill>
-                  <a:srgbClr val="FFFFFF"/>
-                </a:solidFill>
-                <a:latin typeface="微软雅黑"/>
-                <a:ea typeface="微软雅黑"/>
-              </a:rPr>
-              <a:t>第 4–7 周</a:t>
-            </a:r>
-          </a:p>
-        </p:txBody>
-      </p:sp>
-      <p:sp>
-        <p:nvSpPr>
-          <p:cNvPr id="17" name="TextBox 16"/>
-          <p:cNvSpPr txBox="1"/>
-          <p:nvPr/>
-        </p:nvSpPr>
-        <p:spPr>
-          <a:xfrm>
-            <a:off x="2880360" y="3611880"/>
-            <a:ext cx="8595360" cy="1051560"/>
-          </a:xfrm>
-          <a:prstGeom prst="rect">
-            <a:avLst/>
-          </a:prstGeom>
-          <a:noFill/>
-        </p:spPr>
-        <p:txBody>
-          <a:bodyPr wrap="square" anchor="ctr">
-            <a:spAutoFit/>
-          </a:bodyPr>
-          <a:lstStyle/>
-          <a:p>
-            <a:pPr algn="l"/>
+              <a:t>主任因公务不能来，不影响这一项算已完成，也不因此减费用或另收费。</a:t>
+            </a:r>
+          </a:p>
+          <a:p>
+            <a:pPr>
+              <a:lnSpc>
+                <a:spcPct val="120000"/>
+              </a:lnSpc>
+              <a:spcAft>
+                <a:spcPts val="1200"/>
+              </a:spcAft>
+            </a:pPr>
+            <a:r>
+              <a:rPr sz="1700" b="1">
+                <a:solidFill>
+                  <a:srgbClr val="C4A35A"/>
+                </a:solidFill>
+                <a:latin typeface="微软雅黑"/>
+                <a:ea typeface="微软雅黑"/>
+              </a:rPr>
+              <a:t>·  </a:t>
+            </a:r>
             <a:r>
               <a:rPr sz="1700" b="0">
                 <a:solidFill>
@@ -6792,176 +7676,14 @@
                 <a:latin typeface="微软雅黑"/>
                 <a:ea typeface="微软雅黑"/>
               </a:rPr>
-              <a:t>办外滩专题课；同时发出请主任出席的邀请。</a:t>
-            </a:r>
-          </a:p>
-        </p:txBody>
-      </p:sp>
-      <p:sp>
-        <p:nvSpPr>
-          <p:cNvPr id="18" name="Rounded Rectangle 17"/>
-          <p:cNvSpPr/>
-          <p:nvPr/>
-        </p:nvSpPr>
-        <p:spPr>
-          <a:xfrm>
-            <a:off x="457200" y="4800600"/>
-            <a:ext cx="11247120" cy="1051560"/>
-          </a:xfrm>
-          <a:prstGeom prst="roundRect">
-            <a:avLst>
-              <a:gd name="adj" fmla="val 8000"/>
-            </a:avLst>
-          </a:prstGeom>
-          <a:solidFill>
-            <a:srgbClr val="FFFFFF"/>
-          </a:solidFill>
-          <a:ln>
-            <a:noFill/>
-          </a:ln>
-          <a:effectLst/>
-        </p:spPr>
-        <p:style>
-          <a:lnRef idx="1">
-            <a:schemeClr val="accent1"/>
-          </a:lnRef>
-          <a:fillRef idx="3">
-            <a:schemeClr val="accent1"/>
-          </a:fillRef>
-          <a:effectRef idx="2">
-            <a:schemeClr val="accent1"/>
-          </a:effectRef>
-          <a:fontRef idx="minor">
-            <a:schemeClr val="lt1"/>
-          </a:fontRef>
-        </p:style>
-        <p:txBody>
-          <a:bodyPr rtlCol="0" anchor="ctr"/>
-          <a:lstStyle/>
-          <a:p>
-            <a:pPr algn="ctr"/>
-          </a:p>
-        </p:txBody>
-      </p:sp>
-      <p:sp>
-        <p:nvSpPr>
-          <p:cNvPr id="19" name="Rectangle 18"/>
-          <p:cNvSpPr/>
-          <p:nvPr/>
-        </p:nvSpPr>
-        <p:spPr>
-          <a:xfrm>
-            <a:off x="457200" y="4800600"/>
-            <a:ext cx="2194560" cy="1051560"/>
-          </a:xfrm>
-          <a:prstGeom prst="rect">
-            <a:avLst/>
-          </a:prstGeom>
-          <a:solidFill>
-            <a:srgbClr val="003D2E"/>
-          </a:solidFill>
-          <a:ln>
-            <a:noFill/>
-          </a:ln>
-          <a:effectLst/>
-        </p:spPr>
-        <p:style>
-          <a:lnRef idx="1">
-            <a:schemeClr val="accent1"/>
-          </a:lnRef>
-          <a:fillRef idx="3">
-            <a:schemeClr val="accent1"/>
-          </a:fillRef>
-          <a:effectRef idx="2">
-            <a:schemeClr val="accent1"/>
-          </a:effectRef>
-          <a:fontRef idx="minor">
-            <a:schemeClr val="lt1"/>
-          </a:fontRef>
-        </p:style>
-        <p:txBody>
-          <a:bodyPr rtlCol="0" anchor="ctr"/>
-          <a:lstStyle/>
-          <a:p>
-            <a:pPr algn="ctr"/>
-          </a:p>
-        </p:txBody>
-      </p:sp>
-      <p:sp>
-        <p:nvSpPr>
-          <p:cNvPr id="20" name="TextBox 19"/>
-          <p:cNvSpPr txBox="1"/>
-          <p:nvPr/>
-        </p:nvSpPr>
-        <p:spPr>
-          <a:xfrm>
-            <a:off x="457200" y="4800600"/>
-            <a:ext cx="2194560" cy="1051560"/>
-          </a:xfrm>
-          <a:prstGeom prst="rect">
-            <a:avLst/>
-          </a:prstGeom>
-          <a:noFill/>
-        </p:spPr>
-        <p:txBody>
-          <a:bodyPr wrap="square" anchor="ctr">
-            <a:spAutoFit/>
-          </a:bodyPr>
-          <a:lstStyle/>
-          <a:p>
-            <a:pPr algn="ctr"/>
-            <a:r>
-              <a:rPr sz="1800" b="1">
-                <a:solidFill>
-                  <a:srgbClr val="FFFFFF"/>
-                </a:solidFill>
-                <a:latin typeface="微软雅黑"/>
-                <a:ea typeface="微软雅黑"/>
-              </a:rPr>
-              <a:t>第 8–12 周</a:t>
-            </a:r>
-          </a:p>
-        </p:txBody>
-      </p:sp>
-      <p:sp>
-        <p:nvSpPr>
-          <p:cNvPr id="21" name="TextBox 20"/>
-          <p:cNvSpPr txBox="1"/>
-          <p:nvPr/>
-        </p:nvSpPr>
-        <p:spPr>
-          <a:xfrm>
-            <a:off x="2880360" y="4800600"/>
-            <a:ext cx="8595360" cy="1051560"/>
-          </a:xfrm>
-          <a:prstGeom prst="rect">
-            <a:avLst/>
-          </a:prstGeom>
-          <a:noFill/>
-        </p:spPr>
-        <p:txBody>
-          <a:bodyPr wrap="square" anchor="ctr">
-            <a:spAutoFit/>
-          </a:bodyPr>
-          <a:lstStyle/>
-          <a:p>
-            <a:pPr algn="l"/>
-            <a:r>
-              <a:rPr sz="1700" b="0">
-                <a:solidFill>
-                  <a:srgbClr val="1A2420"/>
-                </a:solidFill>
-                <a:latin typeface="微软雅黑"/>
-                <a:ea typeface="微软雅黑"/>
-              </a:rPr>
-              <a:t>把课上的情况和名单交给中心。后面若要续办或谈别的事，再另写。</a:t>
-            </a:r>
-          </a:p>
-        </p:txBody>
-      </p:sp>
-      <p:sp>
-        <p:nvSpPr>
-          <p:cNvPr id="22" name="TextBox 21"/>
+              <a:t>港大本部出海课程怎么推广、原创谷怎么合作、学生在上海实习参访，本期不写进交付，以后另说。</a:t>
+            </a:r>
+          </a:p>
+        </p:txBody>
+      </p:sp>
+      <p:sp>
+        <p:nvSpPr>
+          <p:cNvPr id="9" name="TextBox 8"/>
           <p:cNvSpPr txBox="1"/>
           <p:nvPr/>
         </p:nvSpPr>
@@ -7132,7 +7854,7 @@
                 <a:latin typeface="微软雅黑"/>
                 <a:ea typeface="微软雅黑"/>
               </a:rPr>
-              <a:t>各自做什么</a:t>
+              <a:t>九十天怎么排</a:t>
             </a:r>
           </a:p>
         </p:txBody>
@@ -7168,7 +7890,7 @@
                 <a:latin typeface="微软雅黑"/>
                 <a:ea typeface="微软雅黑"/>
               </a:rPr>
-              <a:t>7/10</a:t>
+              <a:t>7/11</a:t>
             </a:r>
           </a:p>
         </p:txBody>
@@ -7181,8 +7903,8 @@
         </p:nvSpPr>
         <p:spPr>
           <a:xfrm>
-            <a:off x="411480" y="1234440"/>
-            <a:ext cx="5577840" cy="4937760"/>
+            <a:off x="457200" y="1234440"/>
+            <a:ext cx="11247120" cy="1051560"/>
           </a:xfrm>
           <a:prstGeom prst="roundRect">
             <a:avLst>
@@ -7227,8 +7949,8 @@
         </p:nvSpPr>
         <p:spPr>
           <a:xfrm>
-            <a:off x="411480" y="1234440"/>
-            <a:ext cx="5577840" cy="640080"/>
+            <a:off x="457200" y="1234440"/>
+            <a:ext cx="2194560" cy="1051560"/>
           </a:xfrm>
           <a:prstGeom prst="rect">
             <a:avLst/>
@@ -7271,8 +7993,8 @@
         </p:nvSpPr>
         <p:spPr>
           <a:xfrm>
-            <a:off x="411480" y="1234440"/>
-            <a:ext cx="5577840" cy="640080"/>
+            <a:off x="457200" y="1234440"/>
+            <a:ext cx="2194560" cy="1051560"/>
           </a:xfrm>
           <a:prstGeom prst="rect">
             <a:avLst/>
@@ -7294,7 +8016,7 @@
                 <a:latin typeface="微软雅黑"/>
                 <a:ea typeface="微软雅黑"/>
               </a:rPr>
-              <a:t>香港大学经管学院上海中心</a:t>
+              <a:t>第 1 周</a:t>
             </a:r>
           </a:p>
         </p:txBody>
@@ -7307,8 +8029,8 @@
         </p:nvSpPr>
         <p:spPr>
           <a:xfrm>
-            <a:off x="640080" y="2057400"/>
-            <a:ext cx="5120640" cy="3840480"/>
+            <a:off x="2880360" y="1234440"/>
+            <a:ext cx="8595360" cy="1051560"/>
           </a:xfrm>
           <a:prstGeom prst="rect">
             <a:avLst/>
@@ -7316,128 +8038,21 @@
           <a:noFill/>
         </p:spPr>
         <p:txBody>
-          <a:bodyPr wrap="square">
+          <a:bodyPr wrap="square" anchor="ctr">
             <a:spAutoFit/>
           </a:bodyPr>
           <a:lstStyle/>
           <a:p>
-            <a:pPr>
-              <a:lnSpc>
-                <a:spcPct val="120000"/>
-              </a:lnSpc>
-              <a:spcAft>
-                <a:spcPts val="1200"/>
-              </a:spcAft>
-            </a:pPr>
-            <a:r>
-              <a:rPr sz="1600" b="1">
-                <a:solidFill>
-                  <a:srgbClr val="C4A35A"/>
-                </a:solidFill>
-                <a:latin typeface="微软雅黑"/>
-                <a:ea typeface="微软雅黑"/>
-              </a:rPr>
-              <a:t>·  </a:t>
-            </a:r>
-            <a:r>
-              <a:rPr sz="1600" b="0">
+            <a:pPr algn="l"/>
+            <a:r>
+              <a:rPr sz="1700" b="0">
                 <a:solidFill>
                   <a:srgbClr val="1A2420"/>
                 </a:solidFill>
                 <a:latin typeface="微软雅黑"/>
                 <a:ea typeface="微软雅黑"/>
               </a:rPr>
-              <a:t>提供外滩中心场地和名义</a:t>
-            </a:r>
-          </a:p>
-          <a:p>
-            <a:pPr>
-              <a:lnSpc>
-                <a:spcPct val="120000"/>
-              </a:lnSpc>
-              <a:spcAft>
-                <a:spcPts val="1200"/>
-              </a:spcAft>
-            </a:pPr>
-            <a:r>
-              <a:rPr sz="1600" b="1">
-                <a:solidFill>
-                  <a:srgbClr val="C4A35A"/>
-                </a:solidFill>
-                <a:latin typeface="微软雅黑"/>
-                <a:ea typeface="微软雅黑"/>
-              </a:rPr>
-              <a:t>·  </a:t>
-            </a:r>
-            <a:r>
-              <a:rPr sz="1600" b="0">
-                <a:solidFill>
-                  <a:srgbClr val="1A2420"/>
-                </a:solidFill>
-                <a:latin typeface="微软雅黑"/>
-                <a:ea typeface="微软雅黑"/>
-              </a:rPr>
-              <a:t>安排老师或校友</a:t>
-            </a:r>
-          </a:p>
-          <a:p>
-            <a:pPr>
-              <a:lnSpc>
-                <a:spcPct val="120000"/>
-              </a:lnSpc>
-              <a:spcAft>
-                <a:spcPts val="1200"/>
-              </a:spcAft>
-            </a:pPr>
-            <a:r>
-              <a:rPr sz="1600" b="1">
-                <a:solidFill>
-                  <a:srgbClr val="C4A35A"/>
-                </a:solidFill>
-                <a:latin typeface="微软雅黑"/>
-                <a:ea typeface="微软雅黑"/>
-              </a:rPr>
-              <a:t>·  </a:t>
-            </a:r>
-            <a:r>
-              <a:rPr sz="1600" b="0">
-                <a:solidFill>
-                  <a:srgbClr val="1A2420"/>
-                </a:solidFill>
-                <a:latin typeface="微软雅黑"/>
-                <a:ea typeface="微软雅黑"/>
-              </a:rPr>
-              <a:t>招生跟进、面试和录取仍由学院决定</a:t>
-            </a:r>
-          </a:p>
-          <a:p>
-            <a:pPr>
-              <a:lnSpc>
-                <a:spcPct val="120000"/>
-              </a:lnSpc>
-              <a:spcAft>
-                <a:spcPts val="1200"/>
-              </a:spcAft>
-            </a:pPr>
-            <a:r>
-              <a:rPr sz="1600" b="1">
-                <a:solidFill>
-                  <a:srgbClr val="C4A35A"/>
-                </a:solidFill>
-                <a:latin typeface="微软雅黑"/>
-                <a:ea typeface="微软雅黑"/>
-              </a:rPr>
-              <a:t>·  </a:t>
-            </a:r>
-            <a:r>
-              <a:rPr sz="1600" b="0">
-                <a:solidFill>
-                  <a:srgbClr val="1A2420"/>
-                </a:solidFill>
-                <a:latin typeface="微软雅黑"/>
-                <a:ea typeface="微软雅黑"/>
-              </a:rPr>
-              <a:t>请潘老师协助邀请中心主任</a:t>
+              <a:t>签订协议，支付费用；定下外滩课日期；中心告知招生门槛，以及课后由哪位老师接。</a:t>
             </a:r>
           </a:p>
         </p:txBody>
@@ -7450,8 +8065,8 @@
         </p:nvSpPr>
         <p:spPr>
           <a:xfrm>
-            <a:off x="6217920" y="1234440"/>
-            <a:ext cx="5577840" cy="4937760"/>
+            <a:off x="457200" y="2423160"/>
+            <a:ext cx="11247120" cy="1051560"/>
           </a:xfrm>
           <a:prstGeom prst="roundRect">
             <a:avLst>
@@ -7496,14 +8111,14 @@
         </p:nvSpPr>
         <p:spPr>
           <a:xfrm>
-            <a:off x="6217920" y="1234440"/>
-            <a:ext cx="5577840" cy="640080"/>
+            <a:off x="457200" y="2423160"/>
+            <a:ext cx="2194560" cy="1051560"/>
           </a:xfrm>
           <a:prstGeom prst="rect">
             <a:avLst/>
           </a:prstGeom>
           <a:solidFill>
-            <a:srgbClr val="0A5C46"/>
+            <a:srgbClr val="003D2E"/>
           </a:solidFill>
           <a:ln>
             <a:noFill/>
@@ -7540,8 +8155,8 @@
         </p:nvSpPr>
         <p:spPr>
           <a:xfrm>
-            <a:off x="6217920" y="1234440"/>
-            <a:ext cx="5577840" cy="640080"/>
+            <a:off x="457200" y="2423160"/>
+            <a:ext cx="2194560" cy="1051560"/>
           </a:xfrm>
           <a:prstGeom prst="rect">
             <a:avLst/>
@@ -7563,7 +8178,7 @@
                 <a:latin typeface="微软雅黑"/>
                 <a:ea typeface="微软雅黑"/>
               </a:rPr>
-              <a:t>住房政策研究中心、杨浦科企联</a:t>
+              <a:t>第 2–3 周</a:t>
             </a:r>
           </a:p>
         </p:txBody>
@@ -7576,8 +8191,8 @@
         </p:nvSpPr>
         <p:spPr>
           <a:xfrm>
-            <a:off x="6446520" y="2057400"/>
-            <a:ext cx="5120640" cy="3840480"/>
+            <a:off x="2880360" y="2423160"/>
+            <a:ext cx="8595360" cy="1051560"/>
           </a:xfrm>
           <a:prstGeom prst="rect">
             <a:avLst/>
@@ -7585,135 +8200,352 @@
           <a:noFill/>
         </p:spPr>
         <p:txBody>
-          <a:bodyPr wrap="square">
+          <a:bodyPr wrap="square" anchor="ctr">
             <a:spAutoFit/>
           </a:bodyPr>
           <a:lstStyle/>
           <a:p>
-            <a:pPr>
-              <a:lnSpc>
-                <a:spcPct val="120000"/>
-              </a:lnSpc>
-              <a:spcAft>
-                <a:spcPts val="1200"/>
-              </a:spcAft>
-            </a:pPr>
-            <a:r>
-              <a:rPr sz="1600" b="1">
-                <a:solidFill>
-                  <a:srgbClr val="C4A35A"/>
-                </a:solidFill>
-                <a:latin typeface="微软雅黑"/>
-                <a:ea typeface="微软雅黑"/>
-              </a:rPr>
-              <a:t>·  </a:t>
-            </a:r>
-            <a:r>
-              <a:rPr sz="1600" b="0">
+            <a:pPr algn="l"/>
+            <a:r>
+              <a:rPr sz="1700" b="0">
                 <a:solidFill>
                   <a:srgbClr val="1A2420"/>
                 </a:solidFill>
                 <a:latin typeface="微软雅黑"/>
                 <a:ea typeface="微软雅黑"/>
               </a:rPr>
-              <a:t>策划、请人、现场</a:t>
-            </a:r>
-          </a:p>
-          <a:p>
-            <a:pPr>
-              <a:lnSpc>
-                <a:spcPct val="120000"/>
-              </a:lnSpc>
-              <a:spcAft>
-                <a:spcPts val="1200"/>
-              </a:spcAft>
-            </a:pPr>
-            <a:r>
-              <a:rPr sz="1600" b="1">
-                <a:solidFill>
-                  <a:srgbClr val="C4A35A"/>
-                </a:solidFill>
-                <a:latin typeface="微软雅黑"/>
-                <a:ea typeface="微软雅黑"/>
-              </a:rPr>
-              <a:t>·  </a:t>
-            </a:r>
-            <a:r>
-              <a:rPr sz="1600" b="0">
+              <a:t>按门槛拿出拟邀请名单，不少于八十人，双方看过再定。</a:t>
+            </a:r>
+          </a:p>
+        </p:txBody>
+      </p:sp>
+      <p:sp>
+        <p:nvSpPr>
+          <p:cNvPr id="14" name="Rounded Rectangle 13"/>
+          <p:cNvSpPr/>
+          <p:nvPr/>
+        </p:nvSpPr>
+        <p:spPr>
+          <a:xfrm>
+            <a:off x="457200" y="3611880"/>
+            <a:ext cx="11247120" cy="1051560"/>
+          </a:xfrm>
+          <a:prstGeom prst="roundRect">
+            <a:avLst>
+              <a:gd name="adj" fmla="val 8000"/>
+            </a:avLst>
+          </a:prstGeom>
+          <a:solidFill>
+            <a:srgbClr val="FFFFFF"/>
+          </a:solidFill>
+          <a:ln>
+            <a:noFill/>
+          </a:ln>
+          <a:effectLst/>
+        </p:spPr>
+        <p:style>
+          <a:lnRef idx="1">
+            <a:schemeClr val="accent1"/>
+          </a:lnRef>
+          <a:fillRef idx="3">
+            <a:schemeClr val="accent1"/>
+          </a:fillRef>
+          <a:effectRef idx="2">
+            <a:schemeClr val="accent1"/>
+          </a:effectRef>
+          <a:fontRef idx="minor">
+            <a:schemeClr val="lt1"/>
+          </a:fontRef>
+        </p:style>
+        <p:txBody>
+          <a:bodyPr rtlCol="0" anchor="ctr"/>
+          <a:lstStyle/>
+          <a:p>
+            <a:pPr algn="ctr"/>
+          </a:p>
+        </p:txBody>
+      </p:sp>
+      <p:sp>
+        <p:nvSpPr>
+          <p:cNvPr id="15" name="Rectangle 14"/>
+          <p:cNvSpPr/>
+          <p:nvPr/>
+        </p:nvSpPr>
+        <p:spPr>
+          <a:xfrm>
+            <a:off x="457200" y="3611880"/>
+            <a:ext cx="2194560" cy="1051560"/>
+          </a:xfrm>
+          <a:prstGeom prst="rect">
+            <a:avLst/>
+          </a:prstGeom>
+          <a:solidFill>
+            <a:srgbClr val="003D2E"/>
+          </a:solidFill>
+          <a:ln>
+            <a:noFill/>
+          </a:ln>
+          <a:effectLst/>
+        </p:spPr>
+        <p:style>
+          <a:lnRef idx="1">
+            <a:schemeClr val="accent1"/>
+          </a:lnRef>
+          <a:fillRef idx="3">
+            <a:schemeClr val="accent1"/>
+          </a:fillRef>
+          <a:effectRef idx="2">
+            <a:schemeClr val="accent1"/>
+          </a:effectRef>
+          <a:fontRef idx="minor">
+            <a:schemeClr val="lt1"/>
+          </a:fontRef>
+        </p:style>
+        <p:txBody>
+          <a:bodyPr rtlCol="0" anchor="ctr"/>
+          <a:lstStyle/>
+          <a:p>
+            <a:pPr algn="ctr"/>
+          </a:p>
+        </p:txBody>
+      </p:sp>
+      <p:sp>
+        <p:nvSpPr>
+          <p:cNvPr id="16" name="TextBox 15"/>
+          <p:cNvSpPr txBox="1"/>
+          <p:nvPr/>
+        </p:nvSpPr>
+        <p:spPr>
+          <a:xfrm>
+            <a:off x="457200" y="3611880"/>
+            <a:ext cx="2194560" cy="1051560"/>
+          </a:xfrm>
+          <a:prstGeom prst="rect">
+            <a:avLst/>
+          </a:prstGeom>
+          <a:noFill/>
+        </p:spPr>
+        <p:txBody>
+          <a:bodyPr wrap="square" anchor="ctr">
+            <a:spAutoFit/>
+          </a:bodyPr>
+          <a:lstStyle/>
+          <a:p>
+            <a:pPr algn="ctr"/>
+            <a:r>
+              <a:rPr sz="1800" b="1">
+                <a:solidFill>
+                  <a:srgbClr val="FFFFFF"/>
+                </a:solidFill>
+                <a:latin typeface="微软雅黑"/>
+                <a:ea typeface="微软雅黑"/>
+              </a:rPr>
+              <a:t>第 4–7 周</a:t>
+            </a:r>
+          </a:p>
+        </p:txBody>
+      </p:sp>
+      <p:sp>
+        <p:nvSpPr>
+          <p:cNvPr id="17" name="TextBox 16"/>
+          <p:cNvSpPr txBox="1"/>
+          <p:nvPr/>
+        </p:nvSpPr>
+        <p:spPr>
+          <a:xfrm>
+            <a:off x="2880360" y="3611880"/>
+            <a:ext cx="8595360" cy="1051560"/>
+          </a:xfrm>
+          <a:prstGeom prst="rect">
+            <a:avLst/>
+          </a:prstGeom>
+          <a:noFill/>
+        </p:spPr>
+        <p:txBody>
+          <a:bodyPr wrap="square" anchor="ctr">
+            <a:spAutoFit/>
+          </a:bodyPr>
+          <a:lstStyle/>
+          <a:p>
+            <a:pPr algn="l"/>
+            <a:r>
+              <a:rPr sz="1700" b="0">
                 <a:solidFill>
                   <a:srgbClr val="1A2420"/>
                 </a:solidFill>
                 <a:latin typeface="微软雅黑"/>
                 <a:ea typeface="微软雅黑"/>
               </a:rPr>
-              <a:t>会后把纪要和名单交给中心</a:t>
-            </a:r>
-          </a:p>
-          <a:p>
-            <a:pPr>
-              <a:lnSpc>
-                <a:spcPct val="120000"/>
-              </a:lnSpc>
-              <a:spcAft>
-                <a:spcPts val="1200"/>
-              </a:spcAft>
-            </a:pPr>
-            <a:r>
-              <a:rPr sz="1600" b="1">
-                <a:solidFill>
-                  <a:srgbClr val="C4A35A"/>
-                </a:solidFill>
-                <a:latin typeface="微软雅黑"/>
-                <a:ea typeface="微软雅黑"/>
-              </a:rPr>
-              <a:t>·  </a:t>
-            </a:r>
-            <a:r>
-              <a:rPr sz="1600" b="0">
+              <a:t>办外滩出海专题课，课后招生老师单独沟通；同时发出请主任出席的邀请。</a:t>
+            </a:r>
+          </a:p>
+        </p:txBody>
+      </p:sp>
+      <p:sp>
+        <p:nvSpPr>
+          <p:cNvPr id="18" name="Rounded Rectangle 17"/>
+          <p:cNvSpPr/>
+          <p:nvPr/>
+        </p:nvSpPr>
+        <p:spPr>
+          <a:xfrm>
+            <a:off x="457200" y="4800600"/>
+            <a:ext cx="11247120" cy="1051560"/>
+          </a:xfrm>
+          <a:prstGeom prst="roundRect">
+            <a:avLst>
+              <a:gd name="adj" fmla="val 8000"/>
+            </a:avLst>
+          </a:prstGeom>
+          <a:solidFill>
+            <a:srgbClr val="FFFFFF"/>
+          </a:solidFill>
+          <a:ln>
+            <a:noFill/>
+          </a:ln>
+          <a:effectLst/>
+        </p:spPr>
+        <p:style>
+          <a:lnRef idx="1">
+            <a:schemeClr val="accent1"/>
+          </a:lnRef>
+          <a:fillRef idx="3">
+            <a:schemeClr val="accent1"/>
+          </a:fillRef>
+          <a:effectRef idx="2">
+            <a:schemeClr val="accent1"/>
+          </a:effectRef>
+          <a:fontRef idx="minor">
+            <a:schemeClr val="lt1"/>
+          </a:fontRef>
+        </p:style>
+        <p:txBody>
+          <a:bodyPr rtlCol="0" anchor="ctr"/>
+          <a:lstStyle/>
+          <a:p>
+            <a:pPr algn="ctr"/>
+          </a:p>
+        </p:txBody>
+      </p:sp>
+      <p:sp>
+        <p:nvSpPr>
+          <p:cNvPr id="19" name="Rectangle 18"/>
+          <p:cNvSpPr/>
+          <p:nvPr/>
+        </p:nvSpPr>
+        <p:spPr>
+          <a:xfrm>
+            <a:off x="457200" y="4800600"/>
+            <a:ext cx="2194560" cy="1051560"/>
+          </a:xfrm>
+          <a:prstGeom prst="rect">
+            <a:avLst/>
+          </a:prstGeom>
+          <a:solidFill>
+            <a:srgbClr val="003D2E"/>
+          </a:solidFill>
+          <a:ln>
+            <a:noFill/>
+          </a:ln>
+          <a:effectLst/>
+        </p:spPr>
+        <p:style>
+          <a:lnRef idx="1">
+            <a:schemeClr val="accent1"/>
+          </a:lnRef>
+          <a:fillRef idx="3">
+            <a:schemeClr val="accent1"/>
+          </a:fillRef>
+          <a:effectRef idx="2">
+            <a:schemeClr val="accent1"/>
+          </a:effectRef>
+          <a:fontRef idx="minor">
+            <a:schemeClr val="lt1"/>
+          </a:fontRef>
+        </p:style>
+        <p:txBody>
+          <a:bodyPr rtlCol="0" anchor="ctr"/>
+          <a:lstStyle/>
+          <a:p>
+            <a:pPr algn="ctr"/>
+          </a:p>
+        </p:txBody>
+      </p:sp>
+      <p:sp>
+        <p:nvSpPr>
+          <p:cNvPr id="20" name="TextBox 19"/>
+          <p:cNvSpPr txBox="1"/>
+          <p:nvPr/>
+        </p:nvSpPr>
+        <p:spPr>
+          <a:xfrm>
+            <a:off x="457200" y="4800600"/>
+            <a:ext cx="2194560" cy="1051560"/>
+          </a:xfrm>
+          <a:prstGeom prst="rect">
+            <a:avLst/>
+          </a:prstGeom>
+          <a:noFill/>
+        </p:spPr>
+        <p:txBody>
+          <a:bodyPr wrap="square" anchor="ctr">
+            <a:spAutoFit/>
+          </a:bodyPr>
+          <a:lstStyle/>
+          <a:p>
+            <a:pPr algn="ctr"/>
+            <a:r>
+              <a:rPr sz="1800" b="1">
+                <a:solidFill>
+                  <a:srgbClr val="FFFFFF"/>
+                </a:solidFill>
+                <a:latin typeface="微软雅黑"/>
+                <a:ea typeface="微软雅黑"/>
+              </a:rPr>
+              <a:t>第 8–12 周</a:t>
+            </a:r>
+          </a:p>
+        </p:txBody>
+      </p:sp>
+      <p:sp>
+        <p:nvSpPr>
+          <p:cNvPr id="21" name="TextBox 20"/>
+          <p:cNvSpPr txBox="1"/>
+          <p:nvPr/>
+        </p:nvSpPr>
+        <p:spPr>
+          <a:xfrm>
+            <a:off x="2880360" y="4800600"/>
+            <a:ext cx="8595360" cy="1051560"/>
+          </a:xfrm>
+          <a:prstGeom prst="rect">
+            <a:avLst/>
+          </a:prstGeom>
+          <a:noFill/>
+        </p:spPr>
+        <p:txBody>
+          <a:bodyPr wrap="square" anchor="ctr">
+            <a:spAutoFit/>
+          </a:bodyPr>
+          <a:lstStyle/>
+          <a:p>
+            <a:pPr algn="l"/>
+            <a:r>
+              <a:rPr sz="1700" b="0">
                 <a:solidFill>
                   <a:srgbClr val="1A2420"/>
                 </a:solidFill>
                 <a:latin typeface="微软雅黑"/>
                 <a:ea typeface="微软雅黑"/>
               </a:rPr>
-              <a:t>安排请主任出席的那一场活动</a:t>
-            </a:r>
-          </a:p>
-          <a:p>
-            <a:pPr>
-              <a:lnSpc>
-                <a:spcPct val="120000"/>
-              </a:lnSpc>
-              <a:spcAft>
-                <a:spcPts val="1200"/>
-              </a:spcAft>
-            </a:pPr>
-            <a:r>
-              <a:rPr sz="1600" b="1">
-                <a:solidFill>
-                  <a:srgbClr val="C4A35A"/>
-                </a:solidFill>
-                <a:latin typeface="微软雅黑"/>
-                <a:ea typeface="微软雅黑"/>
-              </a:rPr>
-              <a:t>·  </a:t>
-            </a:r>
-            <a:r>
-              <a:rPr sz="1600" b="0">
-                <a:solidFill>
-                  <a:srgbClr val="1A2420"/>
-                </a:solidFill>
-                <a:latin typeface="微软雅黑"/>
-                <a:ea typeface="微软雅黑"/>
-              </a:rPr>
-              <a:t>开票、收款</a:t>
-            </a:r>
-          </a:p>
-        </p:txBody>
-      </p:sp>
-      <p:sp>
-        <p:nvSpPr>
-          <p:cNvPr id="14" name="TextBox 13"/>
+              <a:t>把课上情况和有意向的人交给中心，由招生老师继续跟。后面若要续办或谈别的事，再另写。</a:t>
+            </a:r>
+          </a:p>
+        </p:txBody>
+      </p:sp>
+      <p:sp>
+        <p:nvSpPr>
+          <p:cNvPr id="22" name="TextBox 21"/>
           <p:cNvSpPr txBox="1"/>
           <p:nvPr/>
         </p:nvSpPr>
@@ -7884,7 +8716,7 @@
                 <a:latin typeface="微软雅黑"/>
                 <a:ea typeface="微软雅黑"/>
               </a:rPr>
-              <a:t>费用</a:t>
+              <a:t>各自做什么</a:t>
             </a:r>
           </a:p>
         </p:txBody>
@@ -7920,7 +8752,7 @@
                 <a:latin typeface="微软雅黑"/>
                 <a:ea typeface="微软雅黑"/>
               </a:rPr>
-              <a:t>8/10</a:t>
+              <a:t>8/11</a:t>
             </a:r>
           </a:p>
         </p:txBody>
@@ -7933,13 +8765,57 @@
         </p:nvSpPr>
         <p:spPr>
           <a:xfrm>
-            <a:off x="457200" y="1188720"/>
-            <a:ext cx="11247120" cy="1417320"/>
+            <a:off x="411480" y="1234440"/>
+            <a:ext cx="5577840" cy="4937760"/>
           </a:xfrm>
           <a:prstGeom prst="roundRect">
             <a:avLst>
               <a:gd name="adj" fmla="val 8000"/>
             </a:avLst>
+          </a:prstGeom>
+          <a:solidFill>
+            <a:srgbClr val="FFFFFF"/>
+          </a:solidFill>
+          <a:ln>
+            <a:noFill/>
+          </a:ln>
+          <a:effectLst/>
+        </p:spPr>
+        <p:style>
+          <a:lnRef idx="1">
+            <a:schemeClr val="accent1"/>
+          </a:lnRef>
+          <a:fillRef idx="3">
+            <a:schemeClr val="accent1"/>
+          </a:fillRef>
+          <a:effectRef idx="2">
+            <a:schemeClr val="accent1"/>
+          </a:effectRef>
+          <a:fontRef idx="minor">
+            <a:schemeClr val="lt1"/>
+          </a:fontRef>
+        </p:style>
+        <p:txBody>
+          <a:bodyPr rtlCol="0" anchor="ctr"/>
+          <a:lstStyle/>
+          <a:p>
+            <a:pPr algn="ctr"/>
+          </a:p>
+        </p:txBody>
+      </p:sp>
+      <p:sp>
+        <p:nvSpPr>
+          <p:cNvPr id="7" name="Rectangle 6"/>
+          <p:cNvSpPr/>
+          <p:nvPr/>
+        </p:nvSpPr>
+        <p:spPr>
+          <a:xfrm>
+            <a:off x="411480" y="1234440"/>
+            <a:ext cx="5577840" cy="640080"/>
+          </a:xfrm>
+          <a:prstGeom prst="rect">
+            <a:avLst/>
           </a:prstGeom>
           <a:solidFill>
             <a:srgbClr val="003D2E"/>
@@ -7973,50 +8849,14 @@
       </p:sp>
       <p:sp>
         <p:nvSpPr>
-          <p:cNvPr id="7" name="TextBox 6"/>
-          <p:cNvSpPr txBox="1"/>
-          <p:nvPr/>
-        </p:nvSpPr>
-        <p:spPr>
-          <a:xfrm>
-            <a:off x="731520" y="1298448"/>
-            <a:ext cx="10698480" cy="365760"/>
-          </a:xfrm>
-          <a:prstGeom prst="rect">
-            <a:avLst/>
-          </a:prstGeom>
-          <a:noFill/>
-        </p:spPr>
-        <p:txBody>
-          <a:bodyPr wrap="square" anchor="t">
-            <a:spAutoFit/>
-          </a:bodyPr>
-          <a:lstStyle/>
-          <a:p>
-            <a:pPr algn="l"/>
-            <a:r>
-              <a:rPr sz="1400" b="1">
-                <a:solidFill>
-                  <a:srgbClr val="C4A35A"/>
-                </a:solidFill>
-                <a:latin typeface="微软雅黑"/>
-                <a:ea typeface="微软雅黑"/>
-              </a:rPr>
-              <a:t>前期工作费用</a:t>
-            </a:r>
-          </a:p>
-        </p:txBody>
-      </p:sp>
-      <p:sp>
-        <p:nvSpPr>
           <p:cNvPr id="8" name="TextBox 7"/>
           <p:cNvSpPr txBox="1"/>
           <p:nvPr/>
         </p:nvSpPr>
         <p:spPr>
           <a:xfrm>
-            <a:off x="731520" y="1664208"/>
-            <a:ext cx="10698480" cy="731520"/>
+            <a:off x="411480" y="1234440"/>
+            <a:ext cx="5577840" cy="640080"/>
           </a:xfrm>
           <a:prstGeom prst="rect">
             <a:avLst/>
@@ -8029,16 +8869,16 @@
           </a:bodyPr>
           <a:lstStyle/>
           <a:p>
-            <a:pPr algn="l"/>
-            <a:r>
-              <a:rPr sz="2000" b="1">
+            <a:pPr algn="ctr"/>
+            <a:r>
+              <a:rPr sz="1800" b="1">
                 <a:solidFill>
                   <a:srgbClr val="FFFFFF"/>
                 </a:solidFill>
                 <a:latin typeface="微软雅黑"/>
                 <a:ea typeface="微软雅黑"/>
               </a:rPr>
-              <a:t>人民币捌万捌仟元整（88,000 元）　　协议生效后十个工作日内一次付清，开增值税发票</a:t>
+              <a:t>香港大学经管学院上海中心</a:t>
             </a:r>
           </a:p>
         </p:txBody>
@@ -8051,44 +8891,8 @@
         </p:nvSpPr>
         <p:spPr>
           <a:xfrm>
-            <a:off x="548640" y="2834640"/>
-            <a:ext cx="5486400" cy="365760"/>
-          </a:xfrm>
-          <a:prstGeom prst="rect">
-            <a:avLst/>
-          </a:prstGeom>
-          <a:noFill/>
-        </p:spPr>
-        <p:txBody>
-          <a:bodyPr wrap="square" anchor="t">
-            <a:spAutoFit/>
-          </a:bodyPr>
-          <a:lstStyle/>
-          <a:p>
-            <a:pPr algn="l"/>
-            <a:r>
-              <a:rPr sz="1600" b="1">
-                <a:solidFill>
-                  <a:srgbClr val="003D2E"/>
-                </a:solidFill>
-                <a:latin typeface="微软雅黑"/>
-                <a:ea typeface="微软雅黑"/>
-              </a:rPr>
-              <a:t>这八万八千元包括</a:t>
-            </a:r>
-          </a:p>
-        </p:txBody>
-      </p:sp>
-      <p:sp>
-        <p:nvSpPr>
-          <p:cNvPr id="10" name="TextBox 9"/>
-          <p:cNvSpPr txBox="1"/>
-          <p:nvPr/>
-        </p:nvSpPr>
-        <p:spPr>
-          <a:xfrm>
-            <a:off x="502920" y="3246120"/>
-            <a:ext cx="5486400" cy="2926080"/>
+            <a:off x="640080" y="2057400"/>
+            <a:ext cx="5120640" cy="3840480"/>
           </a:xfrm>
           <a:prstGeom prst="rect">
             <a:avLst/>
@@ -8106,7 +8910,7 @@
                 <a:spcPct val="120000"/>
               </a:lnSpc>
               <a:spcAft>
-                <a:spcPts val="800"/>
+                <a:spcPts val="1000"/>
               </a:spcAft>
             </a:pPr>
             <a:r>
@@ -8127,7 +8931,7 @@
                 <a:latin typeface="微软雅黑"/>
                 <a:ea typeface="微软雅黑"/>
               </a:rPr>
-              <a:t>九十天的筹备</a:t>
+              <a:t>提供外滩中心场地和名义</a:t>
             </a:r>
           </a:p>
           <a:p>
@@ -8136,7 +8940,7 @@
                 <a:spcPct val="120000"/>
               </a:lnSpc>
               <a:spcAft>
-                <a:spcPts val="800"/>
+                <a:spcPts val="1000"/>
               </a:spcAft>
             </a:pPr>
             <a:r>
@@ -8157,7 +8961,7 @@
                 <a:latin typeface="微软雅黑"/>
                 <a:ea typeface="微软雅黑"/>
               </a:rPr>
-              <a:t>拟邀请名单（不少于八十人）</a:t>
+              <a:t>安排老师或校友</a:t>
             </a:r>
           </a:p>
           <a:p>
@@ -8166,7 +8970,7 @@
                 <a:spcPct val="120000"/>
               </a:lnSpc>
               <a:spcAft>
-                <a:spcPts val="800"/>
+                <a:spcPts val="1000"/>
               </a:spcAft>
             </a:pPr>
             <a:r>
@@ -8187,7 +8991,7 @@
                 <a:latin typeface="微软雅黑"/>
                 <a:ea typeface="微软雅黑"/>
               </a:rPr>
-              <a:t>外滩出海专题课一场</a:t>
+              <a:t>告知 EMBA 初筛条件，课后招生跟进</a:t>
             </a:r>
           </a:p>
           <a:p>
@@ -8196,7 +9000,7 @@
                 <a:spcPct val="120000"/>
               </a:lnSpc>
               <a:spcAft>
-                <a:spcPts val="800"/>
+                <a:spcPts val="1000"/>
               </a:spcAft>
             </a:pPr>
             <a:r>
@@ -8217,7 +9021,7 @@
                 <a:latin typeface="微软雅黑"/>
                 <a:ea typeface="微软雅黑"/>
               </a:rPr>
-              <a:t>请主任出席的一次活动安排</a:t>
+              <a:t>面试和录取仍由学院决定</a:t>
             </a:r>
           </a:p>
           <a:p>
@@ -8226,7 +9030,7 @@
                 <a:spcPct val="120000"/>
               </a:lnSpc>
               <a:spcAft>
-                <a:spcPts val="800"/>
+                <a:spcPts val="1000"/>
               </a:spcAft>
             </a:pPr>
             <a:r>
@@ -8247,21 +9051,111 @@
                 <a:latin typeface="微软雅黑"/>
                 <a:ea typeface="微软雅黑"/>
               </a:rPr>
-              <a:t>课后纪要和名单</a:t>
-            </a:r>
-          </a:p>
-        </p:txBody>
-      </p:sp>
-      <p:sp>
-        <p:nvSpPr>
-          <p:cNvPr id="11" name="TextBox 10"/>
+              <a:t>请潘老师协助邀请中心主任</a:t>
+            </a:r>
+          </a:p>
+        </p:txBody>
+      </p:sp>
+      <p:sp>
+        <p:nvSpPr>
+          <p:cNvPr id="10" name="Rounded Rectangle 9"/>
+          <p:cNvSpPr/>
+          <p:nvPr/>
+        </p:nvSpPr>
+        <p:spPr>
+          <a:xfrm>
+            <a:off x="6217920" y="1234440"/>
+            <a:ext cx="5577840" cy="4937760"/>
+          </a:xfrm>
+          <a:prstGeom prst="roundRect">
+            <a:avLst>
+              <a:gd name="adj" fmla="val 8000"/>
+            </a:avLst>
+          </a:prstGeom>
+          <a:solidFill>
+            <a:srgbClr val="FFFFFF"/>
+          </a:solidFill>
+          <a:ln>
+            <a:noFill/>
+          </a:ln>
+          <a:effectLst/>
+        </p:spPr>
+        <p:style>
+          <a:lnRef idx="1">
+            <a:schemeClr val="accent1"/>
+          </a:lnRef>
+          <a:fillRef idx="3">
+            <a:schemeClr val="accent1"/>
+          </a:fillRef>
+          <a:effectRef idx="2">
+            <a:schemeClr val="accent1"/>
+          </a:effectRef>
+          <a:fontRef idx="minor">
+            <a:schemeClr val="lt1"/>
+          </a:fontRef>
+        </p:style>
+        <p:txBody>
+          <a:bodyPr rtlCol="0" anchor="ctr"/>
+          <a:lstStyle/>
+          <a:p>
+            <a:pPr algn="ctr"/>
+          </a:p>
+        </p:txBody>
+      </p:sp>
+      <p:sp>
+        <p:nvSpPr>
+          <p:cNvPr id="11" name="Rectangle 10"/>
+          <p:cNvSpPr/>
+          <p:nvPr/>
+        </p:nvSpPr>
+        <p:spPr>
+          <a:xfrm>
+            <a:off x="6217920" y="1234440"/>
+            <a:ext cx="5577840" cy="640080"/>
+          </a:xfrm>
+          <a:prstGeom prst="rect">
+            <a:avLst/>
+          </a:prstGeom>
+          <a:solidFill>
+            <a:srgbClr val="0A5C46"/>
+          </a:solidFill>
+          <a:ln>
+            <a:noFill/>
+          </a:ln>
+          <a:effectLst/>
+        </p:spPr>
+        <p:style>
+          <a:lnRef idx="1">
+            <a:schemeClr val="accent1"/>
+          </a:lnRef>
+          <a:fillRef idx="3">
+            <a:schemeClr val="accent1"/>
+          </a:fillRef>
+          <a:effectRef idx="2">
+            <a:schemeClr val="accent1"/>
+          </a:effectRef>
+          <a:fontRef idx="minor">
+            <a:schemeClr val="lt1"/>
+          </a:fontRef>
+        </p:style>
+        <p:txBody>
+          <a:bodyPr rtlCol="0" anchor="ctr"/>
+          <a:lstStyle/>
+          <a:p>
+            <a:pPr algn="ctr"/>
+          </a:p>
+        </p:txBody>
+      </p:sp>
+      <p:sp>
+        <p:nvSpPr>
+          <p:cNvPr id="12" name="TextBox 11"/>
           <p:cNvSpPr txBox="1"/>
           <p:nvPr/>
         </p:nvSpPr>
         <p:spPr>
           <a:xfrm>
-            <a:off x="6309360" y="2834640"/>
-            <a:ext cx="5486400" cy="365760"/>
+            <a:off x="6217920" y="1234440"/>
+            <a:ext cx="5577840" cy="640080"/>
           </a:xfrm>
           <a:prstGeom prst="rect">
             <a:avLst/>
@@ -8269,35 +9163,35 @@
           <a:noFill/>
         </p:spPr>
         <p:txBody>
-          <a:bodyPr wrap="square" anchor="t">
+          <a:bodyPr wrap="square" anchor="ctr">
             <a:spAutoFit/>
           </a:bodyPr>
           <a:lstStyle/>
           <a:p>
-            <a:pPr algn="l"/>
-            <a:r>
-              <a:rPr sz="1600" b="1">
-                <a:solidFill>
-                  <a:srgbClr val="003D2E"/>
-                </a:solidFill>
-                <a:latin typeface="微软雅黑"/>
-                <a:ea typeface="微软雅黑"/>
-              </a:rPr>
-              <a:t>不包括</a:t>
-            </a:r>
-          </a:p>
-        </p:txBody>
-      </p:sp>
-      <p:sp>
-        <p:nvSpPr>
-          <p:cNvPr id="12" name="TextBox 11"/>
+            <a:pPr algn="ctr"/>
+            <a:r>
+              <a:rPr sz="1800" b="1">
+                <a:solidFill>
+                  <a:srgbClr val="FFFFFF"/>
+                </a:solidFill>
+                <a:latin typeface="微软雅黑"/>
+                <a:ea typeface="微软雅黑"/>
+              </a:rPr>
+              <a:t>住房政策研究中心、杨浦科企联</a:t>
+            </a:r>
+          </a:p>
+        </p:txBody>
+      </p:sp>
+      <p:sp>
+        <p:nvSpPr>
+          <p:cNvPr id="13" name="TextBox 12"/>
           <p:cNvSpPr txBox="1"/>
           <p:nvPr/>
         </p:nvSpPr>
         <p:spPr>
           <a:xfrm>
-            <a:off x="6263640" y="3246120"/>
-            <a:ext cx="5486400" cy="2926080"/>
+            <a:off x="6446520" y="2057400"/>
+            <a:ext cx="5120640" cy="3840480"/>
           </a:xfrm>
           <a:prstGeom prst="rect">
             <a:avLst/>
@@ -8315,7 +9209,7 @@
                 <a:spcPct val="120000"/>
               </a:lnSpc>
               <a:spcAft>
-                <a:spcPts val="800"/>
+                <a:spcPts val="1000"/>
               </a:spcAft>
             </a:pPr>
             <a:r>
@@ -8336,7 +9230,7 @@
                 <a:latin typeface="微软雅黑"/>
                 <a:ea typeface="微软雅黑"/>
               </a:rPr>
-              <a:t>学费、报名费，也不按人头分成</a:t>
+              <a:t>按门槛筛名单、请人、现场</a:t>
             </a:r>
           </a:p>
           <a:p>
@@ -8345,7 +9239,7 @@
                 <a:spcPct val="120000"/>
               </a:lnSpc>
               <a:spcAft>
-                <a:spcPts val="800"/>
+                <a:spcPts val="1000"/>
               </a:spcAft>
             </a:pPr>
             <a:r>
@@ -8366,7 +9260,7 @@
                 <a:latin typeface="微软雅黑"/>
                 <a:ea typeface="微软雅黑"/>
               </a:rPr>
-              <a:t>第二场及以后（如需续办，每场六万八千元，另签）</a:t>
+              <a:t>会后把纪要和有意向的人交给中心</a:t>
             </a:r>
           </a:p>
           <a:p>
@@ -8375,7 +9269,7 @@
                 <a:spcPct val="120000"/>
               </a:lnSpc>
               <a:spcAft>
-                <a:spcPts val="800"/>
+                <a:spcPts val="1000"/>
               </a:spcAft>
             </a:pPr>
             <a:r>
@@ -8396,7 +9290,7 @@
                 <a:latin typeface="微软雅黑"/>
                 <a:ea typeface="微软雅黑"/>
               </a:rPr>
-              <a:t>港大本部出海课程的招生</a:t>
+              <a:t>安排请主任出席的那一场活动</a:t>
             </a:r>
           </a:p>
           <a:p>
@@ -8405,7 +9299,7 @@
                 <a:spcPct val="120000"/>
               </a:lnSpc>
               <a:spcAft>
-                <a:spcPts val="800"/>
+                <a:spcPts val="1000"/>
               </a:spcAft>
             </a:pPr>
             <a:r>
@@ -8426,14 +9320,14 @@
                 <a:latin typeface="微软雅黑"/>
                 <a:ea typeface="微软雅黑"/>
               </a:rPr>
-              <a:t>原创谷的日常事务</a:t>
-            </a:r>
-          </a:p>
-        </p:txBody>
-      </p:sp>
-      <p:sp>
-        <p:nvSpPr>
-          <p:cNvPr id="13" name="TextBox 12"/>
+              <a:t>开票、收款</a:t>
+            </a:r>
+          </a:p>
+        </p:txBody>
+      </p:sp>
+      <p:sp>
+        <p:nvSpPr>
+          <p:cNvPr id="14" name="TextBox 13"/>
           <p:cNvSpPr txBox="1"/>
           <p:nvPr/>
         </p:nvSpPr>
@@ -8604,7 +9498,7 @@
                 <a:latin typeface="微软雅黑"/>
                 <a:ea typeface="微软雅黑"/>
               </a:rPr>
-              <a:t>请中心定几件事</a:t>
+              <a:t>费用：三件事一笔，不是单买主任出席</a:t>
             </a:r>
           </a:p>
         </p:txBody>
@@ -8640,7 +9534,7 @@
                 <a:latin typeface="微软雅黑"/>
                 <a:ea typeface="微软雅黑"/>
               </a:rPr>
-              <a:t>9/10</a:t>
+              <a:t>9/11</a:t>
             </a:r>
           </a:p>
         </p:txBody>
@@ -8653,8 +9547,8 @@
         </p:nvSpPr>
         <p:spPr>
           <a:xfrm>
-            <a:off x="502920" y="1280160"/>
-            <a:ext cx="11155680" cy="1097280"/>
+            <a:off x="457200" y="1170432"/>
+            <a:ext cx="11247120" cy="1353312"/>
           </a:xfrm>
           <a:prstGeom prst="roundRect">
             <a:avLst>
@@ -8662,7 +9556,7 @@
             </a:avLst>
           </a:prstGeom>
           <a:solidFill>
-            <a:srgbClr val="FFFFFF"/>
+            <a:srgbClr val="003D2E"/>
           </a:solidFill>
           <a:ln>
             <a:noFill/>
@@ -8693,47 +9587,37 @@
       </p:sp>
       <p:sp>
         <p:nvSpPr>
-          <p:cNvPr id="7" name="Rounded Rectangle 6"/>
-          <p:cNvSpPr/>
-          <p:nvPr/>
-        </p:nvSpPr>
-        <p:spPr>
-          <a:xfrm>
-            <a:off x="731520" y="1536192"/>
-            <a:ext cx="594360" cy="594360"/>
-          </a:xfrm>
-          <a:prstGeom prst="roundRect">
-            <a:avLst>
-              <a:gd name="adj" fmla="val 8000"/>
-            </a:avLst>
-          </a:prstGeom>
-          <a:solidFill>
-            <a:srgbClr val="C4A35A"/>
-          </a:solidFill>
-          <a:ln>
-            <a:noFill/>
-          </a:ln>
-          <a:effectLst/>
-        </p:spPr>
-        <p:style>
-          <a:lnRef idx="1">
-            <a:schemeClr val="accent1"/>
-          </a:lnRef>
-          <a:fillRef idx="3">
-            <a:schemeClr val="accent1"/>
-          </a:fillRef>
-          <a:effectRef idx="2">
-            <a:schemeClr val="accent1"/>
-          </a:effectRef>
-          <a:fontRef idx="minor">
-            <a:schemeClr val="lt1"/>
-          </a:fontRef>
-        </p:style>
-        <p:txBody>
-          <a:bodyPr rtlCol="0" anchor="ctr"/>
-          <a:lstStyle/>
-          <a:p>
-            <a:pPr algn="ctr"/>
+          <p:cNvPr id="7" name="TextBox 6"/>
+          <p:cNvSpPr txBox="1"/>
+          <p:nvPr/>
+        </p:nvSpPr>
+        <p:spPr>
+          <a:xfrm>
+            <a:off x="731520" y="1243584"/>
+            <a:ext cx="10698480" cy="292608"/>
+          </a:xfrm>
+          <a:prstGeom prst="rect">
+            <a:avLst/>
+          </a:prstGeom>
+          <a:noFill/>
+        </p:spPr>
+        <p:txBody>
+          <a:bodyPr wrap="square" anchor="t">
+            <a:spAutoFit/>
+          </a:bodyPr>
+          <a:lstStyle/>
+          <a:p>
+            <a:pPr algn="l"/>
+            <a:r>
+              <a:rPr sz="1400" b="1">
+                <a:solidFill>
+                  <a:srgbClr val="C4A35A"/>
+                </a:solidFill>
+                <a:latin typeface="微软雅黑"/>
+                <a:ea typeface="微软雅黑"/>
+              </a:rPr>
+              <a:t>前期工作费用（一整包）</a:t>
+            </a:r>
           </a:p>
         </p:txBody>
       </p:sp>
@@ -8746,7 +9630,7 @@
         <p:spPr>
           <a:xfrm>
             <a:off x="731520" y="1536192"/>
-            <a:ext cx="594360" cy="594360"/>
+            <a:ext cx="10698480" cy="822960"/>
           </a:xfrm>
           <a:prstGeom prst="rect">
             <a:avLst/>
@@ -8759,16 +9643,16 @@
           </a:bodyPr>
           <a:lstStyle/>
           <a:p>
-            <a:pPr algn="ctr"/>
-            <a:r>
-              <a:rPr sz="2000" b="1">
-                <a:solidFill>
-                  <a:srgbClr val="003D2E"/>
-                </a:solidFill>
-                <a:latin typeface="微软雅黑"/>
-                <a:ea typeface="微软雅黑"/>
-              </a:rPr>
-              <a:t>1</a:t>
+            <a:pPr algn="l"/>
+            <a:r>
+              <a:rPr sz="1800" b="1">
+                <a:solidFill>
+                  <a:srgbClr val="FFFFFF"/>
+                </a:solidFill>
+                <a:latin typeface="微软雅黑"/>
+                <a:ea typeface="微软雅黑"/>
+              </a:rPr>
+              <a:t>人民币捌万捌仟元整（88,000 元）　　协议生效后十个工作日内一次付清，开增值税发票</a:t>
             </a:r>
           </a:p>
         </p:txBody>
@@ -8781,372 +9665,8 @@
         </p:nvSpPr>
         <p:spPr>
           <a:xfrm>
-            <a:off x="1554480" y="1463040"/>
-            <a:ext cx="9784080" cy="731520"/>
-          </a:xfrm>
-          <a:prstGeom prst="rect">
-            <a:avLst/>
-          </a:prstGeom>
-          <a:noFill/>
-        </p:spPr>
-        <p:txBody>
-          <a:bodyPr wrap="square" anchor="ctr">
-            <a:spAutoFit/>
-          </a:bodyPr>
-          <a:lstStyle/>
-          <a:p>
-            <a:pPr algn="l"/>
-            <a:r>
-              <a:rPr sz="1800" b="0">
-                <a:solidFill>
-                  <a:srgbClr val="1A2420"/>
-                </a:solidFill>
-                <a:latin typeface="微软雅黑"/>
-                <a:ea typeface="微软雅黑"/>
-              </a:rPr>
-              <a:t>外滩专题课放在哪一天。</a:t>
-            </a:r>
-          </a:p>
-        </p:txBody>
-      </p:sp>
-      <p:sp>
-        <p:nvSpPr>
-          <p:cNvPr id="10" name="Rounded Rectangle 9"/>
-          <p:cNvSpPr/>
-          <p:nvPr/>
-        </p:nvSpPr>
-        <p:spPr>
-          <a:xfrm>
-            <a:off x="502920" y="2514600"/>
-            <a:ext cx="11155680" cy="1097280"/>
-          </a:xfrm>
-          <a:prstGeom prst="roundRect">
-            <a:avLst>
-              <a:gd name="adj" fmla="val 8000"/>
-            </a:avLst>
-          </a:prstGeom>
-          <a:solidFill>
-            <a:srgbClr val="FFFFFF"/>
-          </a:solidFill>
-          <a:ln>
-            <a:noFill/>
-          </a:ln>
-          <a:effectLst/>
-        </p:spPr>
-        <p:style>
-          <a:lnRef idx="1">
-            <a:schemeClr val="accent1"/>
-          </a:lnRef>
-          <a:fillRef idx="3">
-            <a:schemeClr val="accent1"/>
-          </a:fillRef>
-          <a:effectRef idx="2">
-            <a:schemeClr val="accent1"/>
-          </a:effectRef>
-          <a:fontRef idx="minor">
-            <a:schemeClr val="lt1"/>
-          </a:fontRef>
-        </p:style>
-        <p:txBody>
-          <a:bodyPr rtlCol="0" anchor="ctr"/>
-          <a:lstStyle/>
-          <a:p>
-            <a:pPr algn="ctr"/>
-          </a:p>
-        </p:txBody>
-      </p:sp>
-      <p:sp>
-        <p:nvSpPr>
-          <p:cNvPr id="11" name="Rounded Rectangle 10"/>
-          <p:cNvSpPr/>
-          <p:nvPr/>
-        </p:nvSpPr>
-        <p:spPr>
-          <a:xfrm>
-            <a:off x="731520" y="2770632"/>
-            <a:ext cx="594360" cy="594360"/>
-          </a:xfrm>
-          <a:prstGeom prst="roundRect">
-            <a:avLst>
-              <a:gd name="adj" fmla="val 8000"/>
-            </a:avLst>
-          </a:prstGeom>
-          <a:solidFill>
-            <a:srgbClr val="C4A35A"/>
-          </a:solidFill>
-          <a:ln>
-            <a:noFill/>
-          </a:ln>
-          <a:effectLst/>
-        </p:spPr>
-        <p:style>
-          <a:lnRef idx="1">
-            <a:schemeClr val="accent1"/>
-          </a:lnRef>
-          <a:fillRef idx="3">
-            <a:schemeClr val="accent1"/>
-          </a:fillRef>
-          <a:effectRef idx="2">
-            <a:schemeClr val="accent1"/>
-          </a:effectRef>
-          <a:fontRef idx="minor">
-            <a:schemeClr val="lt1"/>
-          </a:fontRef>
-        </p:style>
-        <p:txBody>
-          <a:bodyPr rtlCol="0" anchor="ctr"/>
-          <a:lstStyle/>
-          <a:p>
-            <a:pPr algn="ctr"/>
-          </a:p>
-        </p:txBody>
-      </p:sp>
-      <p:sp>
-        <p:nvSpPr>
-          <p:cNvPr id="12" name="TextBox 11"/>
-          <p:cNvSpPr txBox="1"/>
-          <p:nvPr/>
-        </p:nvSpPr>
-        <p:spPr>
-          <a:xfrm>
-            <a:off x="731520" y="2770632"/>
-            <a:ext cx="594360" cy="594360"/>
-          </a:xfrm>
-          <a:prstGeom prst="rect">
-            <a:avLst/>
-          </a:prstGeom>
-          <a:noFill/>
-        </p:spPr>
-        <p:txBody>
-          <a:bodyPr wrap="square" anchor="ctr">
-            <a:spAutoFit/>
-          </a:bodyPr>
-          <a:lstStyle/>
-          <a:p>
-            <a:pPr algn="ctr"/>
-            <a:r>
-              <a:rPr sz="2000" b="1">
-                <a:solidFill>
-                  <a:srgbClr val="003D2E"/>
-                </a:solidFill>
-                <a:latin typeface="微软雅黑"/>
-                <a:ea typeface="微软雅黑"/>
-              </a:rPr>
-              <a:t>2</a:t>
-            </a:r>
-          </a:p>
-        </p:txBody>
-      </p:sp>
-      <p:sp>
-        <p:nvSpPr>
-          <p:cNvPr id="13" name="TextBox 12"/>
-          <p:cNvSpPr txBox="1"/>
-          <p:nvPr/>
-        </p:nvSpPr>
-        <p:spPr>
-          <a:xfrm>
-            <a:off x="1554480" y="2697480"/>
-            <a:ext cx="9784080" cy="731520"/>
-          </a:xfrm>
-          <a:prstGeom prst="rect">
-            <a:avLst/>
-          </a:prstGeom>
-          <a:noFill/>
-        </p:spPr>
-        <p:txBody>
-          <a:bodyPr wrap="square" anchor="ctr">
-            <a:spAutoFit/>
-          </a:bodyPr>
-          <a:lstStyle/>
-          <a:p>
-            <a:pPr algn="l"/>
-            <a:r>
-              <a:rPr sz="1800" b="0">
-                <a:solidFill>
-                  <a:srgbClr val="1A2420"/>
-                </a:solidFill>
-                <a:latin typeface="微软雅黑"/>
-                <a:ea typeface="微软雅黑"/>
-              </a:rPr>
-              <a:t>主任方便出席的大致时间。来不了也没有关系，我们按书面邀请办理。</a:t>
-            </a:r>
-          </a:p>
-        </p:txBody>
-      </p:sp>
-      <p:sp>
-        <p:nvSpPr>
-          <p:cNvPr id="14" name="Rounded Rectangle 13"/>
-          <p:cNvSpPr/>
-          <p:nvPr/>
-        </p:nvSpPr>
-        <p:spPr>
-          <a:xfrm>
-            <a:off x="502920" y="3749039"/>
-            <a:ext cx="11155680" cy="1097280"/>
-          </a:xfrm>
-          <a:prstGeom prst="roundRect">
-            <a:avLst>
-              <a:gd name="adj" fmla="val 8000"/>
-            </a:avLst>
-          </a:prstGeom>
-          <a:solidFill>
-            <a:srgbClr val="FFFFFF"/>
-          </a:solidFill>
-          <a:ln>
-            <a:noFill/>
-          </a:ln>
-          <a:effectLst/>
-        </p:spPr>
-        <p:style>
-          <a:lnRef idx="1">
-            <a:schemeClr val="accent1"/>
-          </a:lnRef>
-          <a:fillRef idx="3">
-            <a:schemeClr val="accent1"/>
-          </a:fillRef>
-          <a:effectRef idx="2">
-            <a:schemeClr val="accent1"/>
-          </a:effectRef>
-          <a:fontRef idx="minor">
-            <a:schemeClr val="lt1"/>
-          </a:fontRef>
-        </p:style>
-        <p:txBody>
-          <a:bodyPr rtlCol="0" anchor="ctr"/>
-          <a:lstStyle/>
-          <a:p>
-            <a:pPr algn="ctr"/>
-          </a:p>
-        </p:txBody>
-      </p:sp>
-      <p:sp>
-        <p:nvSpPr>
-          <p:cNvPr id="15" name="Rounded Rectangle 14"/>
-          <p:cNvSpPr/>
-          <p:nvPr/>
-        </p:nvSpPr>
-        <p:spPr>
-          <a:xfrm>
-            <a:off x="731520" y="4005071"/>
-            <a:ext cx="594360" cy="594360"/>
-          </a:xfrm>
-          <a:prstGeom prst="roundRect">
-            <a:avLst>
-              <a:gd name="adj" fmla="val 8000"/>
-            </a:avLst>
-          </a:prstGeom>
-          <a:solidFill>
-            <a:srgbClr val="C4A35A"/>
-          </a:solidFill>
-          <a:ln>
-            <a:noFill/>
-          </a:ln>
-          <a:effectLst/>
-        </p:spPr>
-        <p:style>
-          <a:lnRef idx="1">
-            <a:schemeClr val="accent1"/>
-          </a:lnRef>
-          <a:fillRef idx="3">
-            <a:schemeClr val="accent1"/>
-          </a:fillRef>
-          <a:effectRef idx="2">
-            <a:schemeClr val="accent1"/>
-          </a:effectRef>
-          <a:fontRef idx="minor">
-            <a:schemeClr val="lt1"/>
-          </a:fontRef>
-        </p:style>
-        <p:txBody>
-          <a:bodyPr rtlCol="0" anchor="ctr"/>
-          <a:lstStyle/>
-          <a:p>
-            <a:pPr algn="ctr"/>
-          </a:p>
-        </p:txBody>
-      </p:sp>
-      <p:sp>
-        <p:nvSpPr>
-          <p:cNvPr id="16" name="TextBox 15"/>
-          <p:cNvSpPr txBox="1"/>
-          <p:nvPr/>
-        </p:nvSpPr>
-        <p:spPr>
-          <a:xfrm>
-            <a:off x="731520" y="4005071"/>
-            <a:ext cx="594360" cy="594360"/>
-          </a:xfrm>
-          <a:prstGeom prst="rect">
-            <a:avLst/>
-          </a:prstGeom>
-          <a:noFill/>
-        </p:spPr>
-        <p:txBody>
-          <a:bodyPr wrap="square" anchor="ctr">
-            <a:spAutoFit/>
-          </a:bodyPr>
-          <a:lstStyle/>
-          <a:p>
-            <a:pPr algn="ctr"/>
-            <a:r>
-              <a:rPr sz="2000" b="1">
-                <a:solidFill>
-                  <a:srgbClr val="003D2E"/>
-                </a:solidFill>
-                <a:latin typeface="微软雅黑"/>
-                <a:ea typeface="微软雅黑"/>
-              </a:rPr>
-              <a:t>3</a:t>
-            </a:r>
-          </a:p>
-        </p:txBody>
-      </p:sp>
-      <p:sp>
-        <p:nvSpPr>
-          <p:cNvPr id="17" name="TextBox 16"/>
-          <p:cNvSpPr txBox="1"/>
-          <p:nvPr/>
-        </p:nvSpPr>
-        <p:spPr>
-          <a:xfrm>
-            <a:off x="1554480" y="3931919"/>
-            <a:ext cx="9784080" cy="731520"/>
-          </a:xfrm>
-          <a:prstGeom prst="rect">
-            <a:avLst/>
-          </a:prstGeom>
-          <a:noFill/>
-        </p:spPr>
-        <p:txBody>
-          <a:bodyPr wrap="square" anchor="ctr">
-            <a:spAutoFit/>
-          </a:bodyPr>
-          <a:lstStyle/>
-          <a:p>
-            <a:pPr algn="l"/>
-            <a:r>
-              <a:rPr sz="1800" b="0">
-                <a:solidFill>
-                  <a:srgbClr val="1A2420"/>
-                </a:solidFill>
-                <a:latin typeface="微软雅黑"/>
-                <a:ea typeface="微软雅黑"/>
-              </a:rPr>
-              <a:t>协议由哪一家主体签，发票抬头是谁，款什么时候付。</a:t>
-            </a:r>
-          </a:p>
-        </p:txBody>
-      </p:sp>
-      <p:sp>
-        <p:nvSpPr>
-          <p:cNvPr id="18" name="TextBox 17"/>
-          <p:cNvSpPr txBox="1"/>
-          <p:nvPr/>
-        </p:nvSpPr>
-        <p:spPr>
-          <a:xfrm>
-            <a:off x="548640" y="5120640"/>
-            <a:ext cx="11064240" cy="1097280"/>
+            <a:off x="548640" y="2697480"/>
+            <a:ext cx="5486400" cy="329184"/>
           </a:xfrm>
           <a:prstGeom prst="rect">
             <a:avLst/>
@@ -9159,24 +9679,405 @@
           </a:bodyPr>
           <a:lstStyle/>
           <a:p>
-            <a:pPr algn="ctr"/>
+            <a:pPr algn="l"/>
+            <a:r>
+              <a:rPr sz="1600" b="1">
+                <a:solidFill>
+                  <a:srgbClr val="003D2E"/>
+                </a:solidFill>
+                <a:latin typeface="微软雅黑"/>
+                <a:ea typeface="微软雅黑"/>
+              </a:rPr>
+              <a:t>这八万八千元包括</a:t>
+            </a:r>
+          </a:p>
+        </p:txBody>
+      </p:sp>
+      <p:sp>
+        <p:nvSpPr>
+          <p:cNvPr id="10" name="TextBox 9"/>
+          <p:cNvSpPr txBox="1"/>
+          <p:nvPr/>
+        </p:nvSpPr>
+        <p:spPr>
+          <a:xfrm>
+            <a:off x="502920" y="3063240"/>
+            <a:ext cx="5486400" cy="3154680"/>
+          </a:xfrm>
+          <a:prstGeom prst="rect">
+            <a:avLst/>
+          </a:prstGeom>
+          <a:noFill/>
+        </p:spPr>
+        <p:txBody>
+          <a:bodyPr wrap="square">
+            <a:spAutoFit/>
+          </a:bodyPr>
+          <a:lstStyle/>
+          <a:p>
+            <a:pPr>
+              <a:lnSpc>
+                <a:spcPct val="120000"/>
+              </a:lnSpc>
+              <a:spcAft>
+                <a:spcPts val="600"/>
+              </a:spcAft>
+            </a:pPr>
+            <a:r>
+              <a:rPr sz="1500" b="1">
+                <a:solidFill>
+                  <a:srgbClr val="C4A35A"/>
+                </a:solidFill>
+                <a:latin typeface="微软雅黑"/>
+                <a:ea typeface="微软雅黑"/>
+              </a:rPr>
+              <a:t>·  </a:t>
+            </a:r>
             <a:r>
               <a:rPr sz="1500" b="0">
                 <a:solidFill>
-                  <a:srgbClr val="5B6B64"/>
-                </a:solidFill>
-                <a:latin typeface="微软雅黑"/>
-                <a:ea typeface="微软雅黑"/>
-              </a:rPr>
-              <a:t>协议文本随这份汇报一并送上。签好、费用到账后七日内，我们提交拟邀请名单初稿。
-联系人：潘嘉琰　　(86) 180 1860 6086　　jyanpan@hku.hk</a:t>
-            </a:r>
-          </a:p>
-        </p:txBody>
-      </p:sp>
-      <p:sp>
-        <p:nvSpPr>
-          <p:cNvPr id="19" name="TextBox 18"/>
+                  <a:srgbClr val="1A2420"/>
+                </a:solidFill>
+                <a:latin typeface="微软雅黑"/>
+                <a:ea typeface="微软雅黑"/>
+              </a:rPr>
+              <a:t>九十天筹备，以及按 EMBA 门槛组织名单</a:t>
+            </a:r>
+          </a:p>
+          <a:p>
+            <a:pPr>
+              <a:lnSpc>
+                <a:spcPct val="120000"/>
+              </a:lnSpc>
+              <a:spcAft>
+                <a:spcPts val="600"/>
+              </a:spcAft>
+            </a:pPr>
+            <a:r>
+              <a:rPr sz="1500" b="1">
+                <a:solidFill>
+                  <a:srgbClr val="C4A35A"/>
+                </a:solidFill>
+                <a:latin typeface="微软雅黑"/>
+                <a:ea typeface="微软雅黑"/>
+              </a:rPr>
+              <a:t>·  </a:t>
+            </a:r>
+            <a:r>
+              <a:rPr sz="1500" b="0">
+                <a:solidFill>
+                  <a:srgbClr val="1A2420"/>
+                </a:solidFill>
+                <a:latin typeface="微软雅黑"/>
+                <a:ea typeface="微软雅黑"/>
+              </a:rPr>
+              <a:t>拟邀请名单不少于八十人</a:t>
+            </a:r>
+          </a:p>
+          <a:p>
+            <a:pPr>
+              <a:lnSpc>
+                <a:spcPct val="120000"/>
+              </a:lnSpc>
+              <a:spcAft>
+                <a:spcPts val="600"/>
+              </a:spcAft>
+            </a:pPr>
+            <a:r>
+              <a:rPr sz="1500" b="1">
+                <a:solidFill>
+                  <a:srgbClr val="C4A35A"/>
+                </a:solidFill>
+                <a:latin typeface="微软雅黑"/>
+                <a:ea typeface="微软雅黑"/>
+              </a:rPr>
+              <a:t>·  </a:t>
+            </a:r>
+            <a:r>
+              <a:rPr sz="1500" b="0">
+                <a:solidFill>
+                  <a:srgbClr val="1A2420"/>
+                </a:solidFill>
+                <a:latin typeface="微软雅黑"/>
+                <a:ea typeface="微软雅黑"/>
+              </a:rPr>
+              <a:t>外滩出海专题课一场（同时作招生现场）</a:t>
+            </a:r>
+          </a:p>
+          <a:p>
+            <a:pPr>
+              <a:lnSpc>
+                <a:spcPct val="120000"/>
+              </a:lnSpc>
+              <a:spcAft>
+                <a:spcPts val="600"/>
+              </a:spcAft>
+            </a:pPr>
+            <a:r>
+              <a:rPr sz="1500" b="1">
+                <a:solidFill>
+                  <a:srgbClr val="C4A35A"/>
+                </a:solidFill>
+                <a:latin typeface="微软雅黑"/>
+                <a:ea typeface="微软雅黑"/>
+              </a:rPr>
+              <a:t>·  </a:t>
+            </a:r>
+            <a:r>
+              <a:rPr sz="1500" b="0">
+                <a:solidFill>
+                  <a:srgbClr val="1A2420"/>
+                </a:solidFill>
+                <a:latin typeface="微软雅黑"/>
+                <a:ea typeface="微软雅黑"/>
+              </a:rPr>
+              <a:t>课后纪要和有意向的人</a:t>
+            </a:r>
+          </a:p>
+          <a:p>
+            <a:pPr>
+              <a:lnSpc>
+                <a:spcPct val="120000"/>
+              </a:lnSpc>
+              <a:spcAft>
+                <a:spcPts val="600"/>
+              </a:spcAft>
+            </a:pPr>
+            <a:r>
+              <a:rPr sz="1500" b="1">
+                <a:solidFill>
+                  <a:srgbClr val="C4A35A"/>
+                </a:solidFill>
+                <a:latin typeface="微软雅黑"/>
+                <a:ea typeface="微软雅黑"/>
+              </a:rPr>
+              <a:t>·  </a:t>
+            </a:r>
+            <a:r>
+              <a:rPr sz="1500" b="0">
+                <a:solidFill>
+                  <a:srgbClr val="1A2420"/>
+                </a:solidFill>
+                <a:latin typeface="微软雅黑"/>
+                <a:ea typeface="微软雅黑"/>
+              </a:rPr>
+              <a:t>请主任出席一次出海活动（含在包内，不另收费）</a:t>
+            </a:r>
+          </a:p>
+        </p:txBody>
+      </p:sp>
+      <p:sp>
+        <p:nvSpPr>
+          <p:cNvPr id="11" name="TextBox 10"/>
+          <p:cNvSpPr txBox="1"/>
+          <p:nvPr/>
+        </p:nvSpPr>
+        <p:spPr>
+          <a:xfrm>
+            <a:off x="6309360" y="2697480"/>
+            <a:ext cx="5486400" cy="329184"/>
+          </a:xfrm>
+          <a:prstGeom prst="rect">
+            <a:avLst/>
+          </a:prstGeom>
+          <a:noFill/>
+        </p:spPr>
+        <p:txBody>
+          <a:bodyPr wrap="square" anchor="t">
+            <a:spAutoFit/>
+          </a:bodyPr>
+          <a:lstStyle/>
+          <a:p>
+            <a:pPr algn="l"/>
+            <a:r>
+              <a:rPr sz="1600" b="1">
+                <a:solidFill>
+                  <a:srgbClr val="003D2E"/>
+                </a:solidFill>
+                <a:latin typeface="微软雅黑"/>
+                <a:ea typeface="微软雅黑"/>
+              </a:rPr>
+              <a:t>不包括</a:t>
+            </a:r>
+          </a:p>
+        </p:txBody>
+      </p:sp>
+      <p:sp>
+        <p:nvSpPr>
+          <p:cNvPr id="12" name="TextBox 11"/>
+          <p:cNvSpPr txBox="1"/>
+          <p:nvPr/>
+        </p:nvSpPr>
+        <p:spPr>
+          <a:xfrm>
+            <a:off x="6263640" y="3063240"/>
+            <a:ext cx="5486400" cy="3154680"/>
+          </a:xfrm>
+          <a:prstGeom prst="rect">
+            <a:avLst/>
+          </a:prstGeom>
+          <a:noFill/>
+        </p:spPr>
+        <p:txBody>
+          <a:bodyPr wrap="square">
+            <a:spAutoFit/>
+          </a:bodyPr>
+          <a:lstStyle/>
+          <a:p>
+            <a:pPr>
+              <a:lnSpc>
+                <a:spcPct val="120000"/>
+              </a:lnSpc>
+              <a:spcAft>
+                <a:spcPts val="600"/>
+              </a:spcAft>
+            </a:pPr>
+            <a:r>
+              <a:rPr sz="1500" b="1">
+                <a:solidFill>
+                  <a:srgbClr val="C4A35A"/>
+                </a:solidFill>
+                <a:latin typeface="微软雅黑"/>
+                <a:ea typeface="微软雅黑"/>
+              </a:rPr>
+              <a:t>·  </a:t>
+            </a:r>
+            <a:r>
+              <a:rPr sz="1500" b="0">
+                <a:solidFill>
+                  <a:srgbClr val="1A2420"/>
+                </a:solidFill>
+                <a:latin typeface="微软雅黑"/>
+                <a:ea typeface="微软雅黑"/>
+              </a:rPr>
+              <a:t>学费、报名费，也不按人头分成</a:t>
+            </a:r>
+          </a:p>
+          <a:p>
+            <a:pPr>
+              <a:lnSpc>
+                <a:spcPct val="120000"/>
+              </a:lnSpc>
+              <a:spcAft>
+                <a:spcPts val="600"/>
+              </a:spcAft>
+            </a:pPr>
+            <a:r>
+              <a:rPr sz="1500" b="1">
+                <a:solidFill>
+                  <a:srgbClr val="C4A35A"/>
+                </a:solidFill>
+                <a:latin typeface="微软雅黑"/>
+                <a:ea typeface="微软雅黑"/>
+              </a:rPr>
+              <a:t>·  </a:t>
+            </a:r>
+            <a:r>
+              <a:rPr sz="1500" b="0">
+                <a:solidFill>
+                  <a:srgbClr val="1A2420"/>
+                </a:solidFill>
+                <a:latin typeface="微软雅黑"/>
+                <a:ea typeface="微软雅黑"/>
+              </a:rPr>
+              <a:t>第二场及以后（如需续办，每场六万八千元，另签）</a:t>
+            </a:r>
+          </a:p>
+          <a:p>
+            <a:pPr>
+              <a:lnSpc>
+                <a:spcPct val="120000"/>
+              </a:lnSpc>
+              <a:spcAft>
+                <a:spcPts val="600"/>
+              </a:spcAft>
+            </a:pPr>
+            <a:r>
+              <a:rPr sz="1500" b="1">
+                <a:solidFill>
+                  <a:srgbClr val="C4A35A"/>
+                </a:solidFill>
+                <a:latin typeface="微软雅黑"/>
+                <a:ea typeface="微软雅黑"/>
+              </a:rPr>
+              <a:t>·  </a:t>
+            </a:r>
+            <a:r>
+              <a:rPr sz="1500" b="0">
+                <a:solidFill>
+                  <a:srgbClr val="1A2420"/>
+                </a:solidFill>
+                <a:latin typeface="微软雅黑"/>
+                <a:ea typeface="微软雅黑"/>
+              </a:rPr>
+              <a:t>港大本部出海课程的招生</a:t>
+            </a:r>
+          </a:p>
+          <a:p>
+            <a:pPr>
+              <a:lnSpc>
+                <a:spcPct val="120000"/>
+              </a:lnSpc>
+              <a:spcAft>
+                <a:spcPts val="600"/>
+              </a:spcAft>
+            </a:pPr>
+            <a:r>
+              <a:rPr sz="1500" b="1">
+                <a:solidFill>
+                  <a:srgbClr val="C4A35A"/>
+                </a:solidFill>
+                <a:latin typeface="微软雅黑"/>
+                <a:ea typeface="微软雅黑"/>
+              </a:rPr>
+              <a:t>·  </a:t>
+            </a:r>
+            <a:r>
+              <a:rPr sz="1500" b="0">
+                <a:solidFill>
+                  <a:srgbClr val="1A2420"/>
+                </a:solidFill>
+                <a:latin typeface="微软雅黑"/>
+                <a:ea typeface="微软雅黑"/>
+              </a:rPr>
+              <a:t>原创谷的日常事务</a:t>
+            </a:r>
+          </a:p>
+          <a:p>
+            <a:pPr>
+              <a:lnSpc>
+                <a:spcPct val="120000"/>
+              </a:lnSpc>
+              <a:spcAft>
+                <a:spcPts val="600"/>
+              </a:spcAft>
+            </a:pPr>
+            <a:r>
+              <a:rPr sz="1500" b="1">
+                <a:solidFill>
+                  <a:srgbClr val="C4A35A"/>
+                </a:solidFill>
+                <a:latin typeface="微软雅黑"/>
+                <a:ea typeface="微软雅黑"/>
+              </a:rPr>
+              <a:t>·  </a:t>
+            </a:r>
+            <a:r>
+              <a:rPr sz="1500" b="0">
+                <a:solidFill>
+                  <a:srgbClr val="1A2420"/>
+                </a:solidFill>
+                <a:latin typeface="微软雅黑"/>
+                <a:ea typeface="微软雅黑"/>
+              </a:rPr>
+              <a:t>就请主任到场再单开一笔费用</a:t>
+            </a:r>
+          </a:p>
+        </p:txBody>
+      </p:sp>
+      <p:sp>
+        <p:nvSpPr>
+          <p:cNvPr id="13" name="TextBox 12"/>
           <p:cNvSpPr txBox="1"/>
           <p:nvPr/>
         </p:nvSpPr>

--- a/output/港大经管上海中心_联合合作汇报.pptx
+++ b/output/港大经管上海中心_联合合作汇报.pptx
@@ -3562,7 +3562,7 @@
         <p:spPr>
           <a:xfrm>
             <a:off x="502920" y="146304"/>
-            <a:ext cx="10241280" cy="640080"/>
+            <a:ext cx="9784080" cy="640080"/>
           </a:xfrm>
           <a:prstGeom prst="rect">
             <a:avLst/>
@@ -4557,7 +4557,7 @@
         <p:spPr>
           <a:xfrm>
             <a:off x="502920" y="146304"/>
-            <a:ext cx="10241280" cy="640080"/>
+            <a:ext cx="9784080" cy="640080"/>
           </a:xfrm>
           <a:prstGeom prst="rect">
             <a:avLst/>
@@ -4697,7 +4697,7 @@
                 <a:latin typeface="微软雅黑"/>
                 <a:ea typeface="微软雅黑"/>
               </a:rPr>
-              <a:t>潘老师：上次谈到华东、华中的招生和市场，主事是 EMBA；也谈到出海，以及请主任到现场看一看。回来后写成一整包。八万八千元不是单独请主任看一场总领事活动。</a:t>
+              <a:t>潘老师：上次谈到华东、华中的招生和市场，主事是 EMBA；也谈到出海，以及请主任到现场看一看。回来后写成一整包：招生是主项，出海课是现场，请主任到场含在同一笔八万八千元里。</a:t>
             </a:r>
           </a:p>
         </p:txBody>
@@ -5339,7 +5339,7 @@
         <p:spPr>
           <a:xfrm>
             <a:off x="502920" y="146304"/>
-            <a:ext cx="10241280" cy="640080"/>
+            <a:ext cx="9784080" cy="640080"/>
           </a:xfrm>
           <a:prstGeom prst="rect">
             <a:avLst/>
@@ -5696,7 +5696,7 @@
         <p:spPr>
           <a:xfrm>
             <a:off x="502920" y="146304"/>
-            <a:ext cx="10241280" cy="640080"/>
+            <a:ext cx="9784080" cy="640080"/>
           </a:xfrm>
           <a:prstGeom prst="rect">
             <a:avLst/>
@@ -6500,7 +6500,7 @@
         <p:spPr>
           <a:xfrm>
             <a:off x="502920" y="146304"/>
-            <a:ext cx="10241280" cy="640080"/>
+            <a:ext cx="9784080" cy="640080"/>
           </a:xfrm>
           <a:prstGeom prst="rect">
             <a:avLst/>
@@ -7422,7 +7422,7 @@
         <p:spPr>
           <a:xfrm>
             <a:off x="502920" y="146304"/>
-            <a:ext cx="10241280" cy="640080"/>
+            <a:ext cx="9784080" cy="640080"/>
           </a:xfrm>
           <a:prstGeom prst="rect">
             <a:avLst/>
@@ -7444,7 +7444,7 @@
                 <a:latin typeface="微软雅黑"/>
                 <a:ea typeface="微软雅黑"/>
               </a:rPr>
-              <a:t>请中心主任到场（含在同一笔费用里）</a:t>
+              <a:t>请中心主任到场</a:t>
             </a:r>
           </a:p>
         </p:txBody>
@@ -7832,7 +7832,7 @@
         <p:spPr>
           <a:xfrm>
             <a:off x="502920" y="146304"/>
-            <a:ext cx="10241280" cy="640080"/>
+            <a:ext cx="9784080" cy="640080"/>
           </a:xfrm>
           <a:prstGeom prst="rect">
             <a:avLst/>
@@ -8694,7 +8694,7 @@
         <p:spPr>
           <a:xfrm>
             <a:off x="502920" y="146304"/>
-            <a:ext cx="10241280" cy="640080"/>
+            <a:ext cx="9784080" cy="640080"/>
           </a:xfrm>
           <a:prstGeom prst="rect">
             <a:avLst/>
@@ -9476,7 +9476,7 @@
         <p:spPr>
           <a:xfrm>
             <a:off x="502920" y="146304"/>
-            <a:ext cx="10241280" cy="640080"/>
+            <a:ext cx="9784080" cy="640080"/>
           </a:xfrm>
           <a:prstGeom prst="rect">
             <a:avLst/>
@@ -9498,7 +9498,7 @@
                 <a:latin typeface="微软雅黑"/>
                 <a:ea typeface="微软雅黑"/>
               </a:rPr>
-              <a:t>费用：三件事一笔，不是单买主任出席</a:t>
+              <a:t>费用：三件事一笔</a:t>
             </a:r>
           </a:p>
         </p:txBody>
